--- a/materials/Chapter03.pptx
+++ b/materials/Chapter03.pptx
@@ -18113,13 +18113,31 @@
               <a:t> John Smith </a:t>
             </a:r>
             <a:r>
-              <a:rPr lang="en-US" altLang="en-IT" sz="1800" i="1" dirty="0">
-                <a:solidFill>
-                  <a:schemeClr val="tx1"/>
-                </a:solidFill>
-                <a:ea typeface="ＭＳ Ｐゴシック" panose="020B0600070205080204" pitchFamily="34" charset="-128"/>
-              </a:rPr>
-              <a:t>works on</a:t>
+              <a:rPr lang="en-US" altLang="en-IT" sz="1800" b="1" i="1" dirty="0">
+                <a:solidFill>
+                  <a:srgbClr val="FF0000"/>
+                </a:solidFill>
+                <a:ea typeface="ＭＳ Ｐゴシック" panose="020B0600070205080204" pitchFamily="34" charset="-128"/>
+              </a:rPr>
+              <a:t>works</a:t>
+            </a:r>
+            <a:r>
+              <a:rPr lang="en-US" altLang="en-IT" sz="1800" b="1" i="1" dirty="0">
+                <a:solidFill>
+                  <a:schemeClr val="tx1"/>
+                </a:solidFill>
+                <a:ea typeface="ＭＳ Ｐゴシック" panose="020B0600070205080204" pitchFamily="34" charset="-128"/>
+              </a:rPr>
+              <a:t> on</a:t>
+            </a:r>
+            <a:r>
+              <a:rPr lang="en-US" altLang="en-IT" sz="1800" b="1" dirty="0">
+                <a:solidFill>
+                  <a:schemeClr val="tx1"/>
+                </a:solidFill>
+                <a:ea typeface="ＭＳ Ｐゴシック" panose="020B0600070205080204" pitchFamily="34" charset="-128"/>
+              </a:rPr>
+              <a:t> </a:t>
             </a:r>
             <a:r>
               <a:rPr lang="en-US" altLang="en-IT" sz="1800" dirty="0">
@@ -18128,7 +18146,7 @@
                 </a:solidFill>
                 <a:ea typeface="ＭＳ Ｐゴシック" panose="020B0600070205080204" pitchFamily="34" charset="-128"/>
               </a:rPr>
-              <a:t> the </a:t>
+              <a:t>the </a:t>
             </a:r>
             <a:r>
               <a:rPr lang="en-US" altLang="en-IT" sz="1800" dirty="0" err="1">
@@ -18185,9 +18203,9 @@
               <a:t> Franklin Wong </a:t>
             </a:r>
             <a:r>
-              <a:rPr lang="en-US" altLang="en-IT" sz="1800" i="1" dirty="0">
-                <a:solidFill>
-                  <a:schemeClr val="tx1"/>
+              <a:rPr lang="en-US" altLang="en-IT" sz="1800" b="1" i="1" dirty="0">
+                <a:solidFill>
+                  <a:srgbClr val="FF0000"/>
                 </a:solidFill>
                 <a:ea typeface="ＭＳ Ｐゴシック" panose="020B0600070205080204" pitchFamily="34" charset="-128"/>
               </a:rPr>
@@ -19846,7 +19864,64 @@
                 </a:solidFill>
                 <a:ea typeface="ＭＳ Ｐゴシック" panose="020B0600070205080204" pitchFamily="34" charset="-128"/>
               </a:rPr>
-              <a:t>Note that the relationship type is not shown with an arrow. The name should be typically be readable from left to right and top to bottom.</a:t>
+              <a:t>Note that the relationship type is not shown with an arrow. </a:t>
+            </a:r>
+          </a:p>
+          <a:p>
+            <a:pPr lvl="1" eaLnBrk="1" hangingPunct="1"/>
+            <a:r>
+              <a:rPr lang="en-US" altLang="en-IT" u="sng" dirty="0">
+                <a:solidFill>
+                  <a:schemeClr val="tx1"/>
+                </a:solidFill>
+                <a:ea typeface="ＭＳ Ｐゴシック" panose="020B0600070205080204" pitchFamily="34" charset="-128"/>
+              </a:rPr>
+              <a:t>The name should be typically be </a:t>
+            </a:r>
+            <a:r>
+              <a:rPr lang="en-US" altLang="en-IT" b="1" u="sng" dirty="0">
+                <a:solidFill>
+                  <a:schemeClr val="tx1"/>
+                </a:solidFill>
+                <a:ea typeface="ＭＳ Ｐゴシック" panose="020B0600070205080204" pitchFamily="34" charset="-128"/>
+              </a:rPr>
+              <a:t>readable</a:t>
+            </a:r>
+            <a:r>
+              <a:rPr lang="en-US" altLang="en-IT" u="sng" dirty="0">
+                <a:solidFill>
+                  <a:schemeClr val="tx1"/>
+                </a:solidFill>
+                <a:ea typeface="ＭＳ Ｐゴシック" panose="020B0600070205080204" pitchFamily="34" charset="-128"/>
+              </a:rPr>
+              <a:t> from </a:t>
+            </a:r>
+            <a:r>
+              <a:rPr lang="en-US" altLang="en-IT" b="1" u="sng" dirty="0">
+                <a:solidFill>
+                  <a:schemeClr val="tx1"/>
+                </a:solidFill>
+                <a:ea typeface="ＭＳ Ｐゴシック" panose="020B0600070205080204" pitchFamily="34" charset="-128"/>
+              </a:rPr>
+              <a:t>left to right </a:t>
+            </a:r>
+            <a:r>
+              <a:rPr lang="en-US" altLang="en-IT" u="sng" dirty="0">
+                <a:solidFill>
+                  <a:schemeClr val="tx1"/>
+                </a:solidFill>
+                <a:ea typeface="ＭＳ Ｐゴシック" panose="020B0600070205080204" pitchFamily="34" charset="-128"/>
+              </a:rPr>
+              <a:t>and </a:t>
+            </a:r>
+            <a:r>
+              <a:rPr lang="en-US" altLang="en-IT" b="1" u="sng" dirty="0">
+                <a:solidFill>
+                  <a:schemeClr val="tx1"/>
+                </a:solidFill>
+                <a:ea typeface="ＭＳ Ｐゴシック" panose="020B0600070205080204" pitchFamily="34" charset="-128"/>
+              </a:rPr>
+              <a:t>top to bottom.</a:t>
             </a:r>
           </a:p>
         </p:txBody>
@@ -20995,7 +21070,7 @@
               <a:buNone/>
             </a:pPr>
             <a:r>
-              <a:rPr lang="en-US" altLang="en-IT" sz="1800" b="1" dirty="0">
+              <a:rPr lang="en-US" altLang="en-IT" sz="1600" b="1" dirty="0">
                 <a:solidFill>
                   <a:schemeClr val="tx1"/>
                 </a:solidFill>
@@ -21004,7 +21079,7 @@
               <a:t>Cardinality Ratio </a:t>
             </a:r>
             <a:r>
-              <a:rPr lang="en-US" altLang="en-IT" sz="1800" dirty="0">
+              <a:rPr lang="en-US" altLang="en-IT" sz="1600" dirty="0">
                 <a:solidFill>
                   <a:schemeClr val="tx1"/>
                 </a:solidFill>
@@ -21013,7 +21088,7 @@
               <a:t>(specifies </a:t>
             </a:r>
             <a:r>
-              <a:rPr lang="en-US" altLang="en-IT" sz="1800" i="1" dirty="0">
+              <a:rPr lang="en-US" altLang="en-IT" sz="1600" i="1" dirty="0">
                 <a:solidFill>
                   <a:schemeClr val="tx1"/>
                 </a:solidFill>
@@ -21022,7 +21097,7 @@
               <a:t>maximum</a:t>
             </a:r>
             <a:r>
-              <a:rPr lang="en-US" altLang="en-IT" sz="1800" dirty="0">
+              <a:rPr lang="en-US" altLang="en-IT" sz="1600" dirty="0">
                 <a:solidFill>
                   <a:schemeClr val="tx1"/>
                 </a:solidFill>
@@ -21038,7 +21113,7 @@
               </a:lnSpc>
             </a:pPr>
             <a:r>
-              <a:rPr lang="en-US" altLang="en-IT" sz="1800" dirty="0">
+              <a:rPr lang="en-US" altLang="en-IT" sz="1600" dirty="0">
                 <a:solidFill>
                   <a:schemeClr val="tx1"/>
                 </a:solidFill>
@@ -21054,7 +21129,7 @@
               </a:lnSpc>
             </a:pPr>
             <a:r>
-              <a:rPr lang="en-US" altLang="en-IT" sz="1800" dirty="0">
+              <a:rPr lang="en-US" altLang="en-IT" sz="1600" dirty="0">
                 <a:solidFill>
                   <a:schemeClr val="tx1"/>
                 </a:solidFill>
@@ -21070,7 +21145,7 @@
               </a:lnSpc>
             </a:pPr>
             <a:r>
-              <a:rPr lang="en-US" altLang="en-IT" sz="1800" dirty="0">
+              <a:rPr lang="en-US" altLang="en-IT" sz="1600" dirty="0">
                 <a:solidFill>
                   <a:schemeClr val="tx1"/>
                 </a:solidFill>
@@ -21086,7 +21161,7 @@
               </a:lnSpc>
             </a:pPr>
             <a:r>
-              <a:rPr lang="en-US" altLang="en-IT" sz="1800" dirty="0">
+              <a:rPr lang="en-US" altLang="en-IT" sz="1600" dirty="0">
                 <a:solidFill>
                   <a:srgbClr val="FF0000"/>
                 </a:solidFill>
@@ -21095,7 +21170,7 @@
               <a:t>Shown by placing appropriate numbers on </a:t>
             </a:r>
             <a:br>
-              <a:rPr lang="en-US" altLang="en-IT" sz="1800" dirty="0">
+              <a:rPr lang="en-US" altLang="en-IT" sz="1600" dirty="0">
                 <a:solidFill>
                   <a:srgbClr val="FF0000"/>
                 </a:solidFill>
@@ -21103,7 +21178,7 @@
               </a:rPr>
             </a:br>
             <a:r>
-              <a:rPr lang="en-US" altLang="en-IT" sz="1800" dirty="0">
+              <a:rPr lang="en-US" altLang="en-IT" sz="1600" dirty="0">
                 <a:solidFill>
                   <a:srgbClr val="FF0000"/>
                 </a:solidFill>
@@ -21118,7 +21193,7 @@
                 <a:spcPct val="100000"/>
               </a:lnSpc>
             </a:pPr>
-            <a:endParaRPr lang="en-US" altLang="en-IT" sz="1800" dirty="0">
+            <a:endParaRPr lang="en-US" altLang="en-IT" sz="1600" dirty="0">
               <a:solidFill>
                 <a:schemeClr val="tx1"/>
               </a:solidFill>
@@ -21133,16 +21208,43 @@
               <a:buNone/>
             </a:pPr>
             <a:r>
-              <a:rPr lang="en-US" altLang="en-IT" sz="1800" b="1" dirty="0">
-                <a:solidFill>
-                  <a:schemeClr val="tx1"/>
-                </a:solidFill>
-                <a:ea typeface="ＭＳ Ｐゴシック" panose="020B0600070205080204" pitchFamily="34" charset="-128"/>
-              </a:rPr>
-              <a:t>Existence Dependency Constraint </a:t>
-            </a:r>
-            <a:r>
-              <a:rPr lang="en-US" altLang="en-IT" sz="1800" dirty="0">
+              <a:rPr lang="en-US" altLang="en-IT" sz="1600" b="1" dirty="0">
+                <a:solidFill>
+                  <a:schemeClr val="tx1"/>
+                </a:solidFill>
+                <a:ea typeface="ＭＳ Ｐゴシック" panose="020B0600070205080204" pitchFamily="34" charset="-128"/>
+              </a:rPr>
+              <a:t>Existence Dependency Constraint: </a:t>
+            </a:r>
+            <a:r>
+              <a:rPr lang="en-US" altLang="en-IT" sz="1600" u="sng" dirty="0">
+                <a:solidFill>
+                  <a:schemeClr val="tx1"/>
+                </a:solidFill>
+                <a:ea typeface="ＭＳ Ｐゴシック" panose="020B0600070205080204" pitchFamily="34" charset="-128"/>
+              </a:rPr>
+              <a:t>The participation constraint specifies whether the existence of an entity depends on its being related to another entity via the relationship </a:t>
+            </a:r>
+            <a:r>
+              <a:rPr lang="en-US" altLang="en-IT" sz="1600" dirty="0">
+                <a:solidFill>
+                  <a:schemeClr val="tx1"/>
+                </a:solidFill>
+                <a:ea typeface="ＭＳ Ｐゴシック" panose="020B0600070205080204" pitchFamily="34" charset="-128"/>
+              </a:rPr>
+              <a:t>type</a:t>
+            </a:r>
+            <a:r>
+              <a:rPr lang="en-US" altLang="en-IT" sz="1600" b="1" dirty="0">
+                <a:solidFill>
+                  <a:schemeClr val="tx1"/>
+                </a:solidFill>
+                <a:ea typeface="ＭＳ Ｐゴシック" panose="020B0600070205080204" pitchFamily="34" charset="-128"/>
+              </a:rPr>
+              <a:t> </a:t>
+            </a:r>
+            <a:r>
+              <a:rPr lang="en-US" altLang="en-IT" sz="1600" dirty="0">
                 <a:solidFill>
                   <a:schemeClr val="tx1"/>
                 </a:solidFill>
@@ -21151,7 +21253,7 @@
               <a:t>(specifies </a:t>
             </a:r>
             <a:r>
-              <a:rPr lang="en-US" altLang="en-IT" sz="1800" i="1" dirty="0">
+              <a:rPr lang="en-US" altLang="en-IT" sz="1600" i="1" dirty="0">
                 <a:solidFill>
                   <a:schemeClr val="tx1"/>
                 </a:solidFill>
@@ -21160,7 +21262,7 @@
               <a:t>minimum</a:t>
             </a:r>
             <a:r>
-              <a:rPr lang="en-US" altLang="en-IT" sz="1800" dirty="0">
+              <a:rPr lang="en-US" altLang="en-IT" sz="1600" dirty="0">
                 <a:solidFill>
                   <a:schemeClr val="tx1"/>
                 </a:solidFill>
@@ -21176,7 +21278,7 @@
               </a:lnSpc>
             </a:pPr>
             <a:r>
-              <a:rPr lang="en-US" altLang="en-IT" sz="1800" dirty="0">
+              <a:rPr lang="en-US" altLang="en-IT" sz="1600" dirty="0">
                 <a:solidFill>
                   <a:schemeClr val="tx1"/>
                 </a:solidFill>
@@ -21192,7 +21294,7 @@
               </a:lnSpc>
             </a:pPr>
             <a:r>
-              <a:rPr lang="en-US" altLang="en-IT" sz="1800" dirty="0">
+              <a:rPr lang="en-US" altLang="en-IT" sz="1600" dirty="0">
                 <a:solidFill>
                   <a:schemeClr val="tx1"/>
                 </a:solidFill>
@@ -21208,8 +21310,8 @@
               </a:lnSpc>
             </a:pPr>
             <a:r>
-              <a:rPr lang="en-US" altLang="en-IT" sz="1800" dirty="0"/>
-              <a:t>Total shown by double line, partial by single line.</a:t>
+              <a:rPr lang="en-US" altLang="en-IT" sz="1600" dirty="0"/>
+              <a:t>Tota (set)l shown by double line, partial by single line.</a:t>
             </a:r>
           </a:p>
           <a:p>

--- a/materials/Chapter03.pptx
+++ b/materials/Chapter03.pptx
@@ -5,10 +5,10 @@
     <p:sldMasterId id="2147483793" r:id="rId1"/>
   </p:sldMasterIdLst>
   <p:notesMasterIdLst>
-    <p:notesMasterId r:id="rId58"/>
+    <p:notesMasterId r:id="rId59"/>
   </p:notesMasterIdLst>
   <p:handoutMasterIdLst>
-    <p:handoutMasterId r:id="rId59"/>
+    <p:handoutMasterId r:id="rId60"/>
   </p:handoutMasterIdLst>
   <p:sldIdLst>
     <p:sldId id="395" r:id="rId2"/>
@@ -57,16 +57,17 @@
     <p:sldId id="351" r:id="rId45"/>
     <p:sldId id="352" r:id="rId46"/>
     <p:sldId id="353" r:id="rId47"/>
-    <p:sldId id="365" r:id="rId48"/>
-    <p:sldId id="366" r:id="rId49"/>
-    <p:sldId id="387" r:id="rId50"/>
-    <p:sldId id="354" r:id="rId51"/>
-    <p:sldId id="371" r:id="rId52"/>
-    <p:sldId id="368" r:id="rId53"/>
-    <p:sldId id="369" r:id="rId54"/>
-    <p:sldId id="392" r:id="rId55"/>
-    <p:sldId id="396" r:id="rId56"/>
-    <p:sldId id="360" r:id="rId57"/>
+    <p:sldId id="406" r:id="rId48"/>
+    <p:sldId id="365" r:id="rId49"/>
+    <p:sldId id="366" r:id="rId50"/>
+    <p:sldId id="387" r:id="rId51"/>
+    <p:sldId id="354" r:id="rId52"/>
+    <p:sldId id="371" r:id="rId53"/>
+    <p:sldId id="368" r:id="rId54"/>
+    <p:sldId id="369" r:id="rId55"/>
+    <p:sldId id="392" r:id="rId56"/>
+    <p:sldId id="396" r:id="rId57"/>
+    <p:sldId id="360" r:id="rId58"/>
   </p:sldIdLst>
   <p:sldSz cx="9144000" cy="6858000" type="letter"/>
   <p:notesSz cx="6858000" cy="9144000"/>
@@ -6925,7 +6926,7 @@
                 <a:latin typeface="Tahoma" panose="020B0604030504040204" pitchFamily="34" charset="0"/>
               </a:rPr>
               <a:pPr/>
-              <a:t>50</a:t>
+              <a:t>51</a:t>
             </a:fld>
             <a:endParaRPr lang="en-CA" altLang="en-IT" sz="1200">
               <a:latin typeface="Tahoma" panose="020B0604030504040204" pitchFamily="34" charset="0"/>
@@ -7452,7 +7453,7 @@
                 <a:latin typeface="Tahoma" panose="020B0604030504040204" pitchFamily="34" charset="0"/>
               </a:rPr>
               <a:pPr/>
-              <a:t>56</a:t>
+              <a:t>57</a:t>
             </a:fld>
             <a:endParaRPr lang="en-CA" altLang="en-IT" sz="1200">
               <a:latin typeface="Tahoma" panose="020B0604030504040204" pitchFamily="34" charset="0"/>
@@ -16769,443 +16770,443 @@
           <a:lstStyle/>
           <a:p>
             <a:r>
-              <a:rPr lang="en-US" sz="1400" dirty="0"/>
+              <a:rPr lang="en-US" sz="1600" dirty="0"/>
               <a:t>Una </a:t>
             </a:r>
             <a:r>
-              <a:rPr lang="en-US" sz="1400" dirty="0" err="1"/>
+              <a:rPr lang="en-US" sz="1600" dirty="0" err="1"/>
               <a:t>biblioteca</a:t>
             </a:r>
             <a:r>
-              <a:rPr lang="en-US" sz="1400" dirty="0"/>
+              <a:rPr lang="en-US" sz="1600" dirty="0"/>
               <a:t> </a:t>
             </a:r>
             <a:r>
-              <a:rPr lang="en-US" sz="1400" dirty="0" err="1"/>
+              <a:rPr lang="en-US" sz="1600" dirty="0" err="1"/>
               <a:t>universitaria</a:t>
             </a:r>
             <a:r>
-              <a:rPr lang="en-US" sz="1400" dirty="0"/>
+              <a:rPr lang="en-US" sz="1600" dirty="0"/>
               <a:t> </a:t>
             </a:r>
             <a:r>
-              <a:rPr lang="en-US" sz="1400" dirty="0" err="1"/>
+              <a:rPr lang="en-US" sz="1600" dirty="0" err="1"/>
               <a:t>vuole</a:t>
             </a:r>
             <a:r>
-              <a:rPr lang="en-US" sz="1400" dirty="0"/>
+              <a:rPr lang="en-US" sz="1600" dirty="0"/>
               <a:t> </a:t>
             </a:r>
             <a:r>
-              <a:rPr lang="en-US" sz="1400" dirty="0" err="1"/>
+              <a:rPr lang="en-US" sz="1600" dirty="0" err="1"/>
               <a:t>realizzare</a:t>
             </a:r>
             <a:r>
-              <a:rPr lang="en-US" sz="1400" dirty="0"/>
+              <a:rPr lang="en-US" sz="1600" dirty="0"/>
               <a:t> un </a:t>
             </a:r>
             <a:r>
-              <a:rPr lang="en-US" sz="1400" dirty="0" err="1"/>
+              <a:rPr lang="en-US" sz="1600" dirty="0" err="1"/>
               <a:t>sistema</a:t>
             </a:r>
             <a:r>
-              <a:rPr lang="en-US" sz="1400" dirty="0"/>
+              <a:rPr lang="en-US" sz="1600" dirty="0"/>
               <a:t> </a:t>
             </a:r>
             <a:r>
-              <a:rPr lang="en-US" sz="1400" dirty="0" err="1"/>
+              <a:rPr lang="en-US" sz="1600" dirty="0" err="1"/>
               <a:t>informativo</a:t>
             </a:r>
             <a:r>
-              <a:rPr lang="en-US" sz="1400" dirty="0"/>
+              <a:rPr lang="en-US" sz="1600" dirty="0"/>
               <a:t> per </a:t>
             </a:r>
             <a:r>
-              <a:rPr lang="en-US" sz="1400" dirty="0" err="1"/>
+              <a:rPr lang="en-US" sz="1600" dirty="0" err="1"/>
               <a:t>gestire</a:t>
             </a:r>
             <a:r>
-              <a:rPr lang="en-US" sz="1400" dirty="0"/>
+              <a:rPr lang="en-US" sz="1600" dirty="0"/>
               <a:t> </a:t>
             </a:r>
             <a:r>
-              <a:rPr lang="en-US" sz="1400" dirty="0" err="1"/>
+              <a:rPr lang="en-US" sz="1600" dirty="0" err="1"/>
               <a:t>i</a:t>
             </a:r>
             <a:r>
-              <a:rPr lang="en-US" sz="1400" dirty="0"/>
+              <a:rPr lang="en-US" sz="1600" dirty="0"/>
               <a:t> </a:t>
             </a:r>
             <a:r>
-              <a:rPr lang="en-US" sz="1400" dirty="0" err="1"/>
+              <a:rPr lang="en-US" sz="1600" dirty="0" err="1"/>
               <a:t>propri</a:t>
             </a:r>
             <a:r>
-              <a:rPr lang="en-US" sz="1400" dirty="0"/>
+              <a:rPr lang="en-US" sz="1600" dirty="0"/>
               <a:t> </a:t>
             </a:r>
             <a:r>
-              <a:rPr lang="en-US" sz="1400" dirty="0" err="1"/>
+              <a:rPr lang="en-US" sz="1600" dirty="0" err="1"/>
               <a:t>servizi</a:t>
             </a:r>
             <a:r>
-              <a:rPr lang="en-US" sz="1400" dirty="0"/>
+              <a:rPr lang="en-US" sz="1600" dirty="0"/>
               <a:t>.</a:t>
             </a:r>
           </a:p>
           <a:p>
             <a:r>
-              <a:rPr lang="en-US" sz="1400" dirty="0"/>
+              <a:rPr lang="en-US" sz="1600" dirty="0"/>
               <a:t>La </a:t>
             </a:r>
             <a:r>
-              <a:rPr lang="en-US" sz="1400" dirty="0" err="1"/>
+              <a:rPr lang="en-US" sz="1600" dirty="0" err="1"/>
               <a:t>biblioteca</a:t>
             </a:r>
             <a:r>
-              <a:rPr lang="en-US" sz="1400" dirty="0"/>
+              <a:rPr lang="en-US" sz="1600" dirty="0"/>
               <a:t> </a:t>
             </a:r>
             <a:r>
-              <a:rPr lang="en-US" sz="1400" dirty="0" err="1"/>
+              <a:rPr lang="en-US" sz="1600" dirty="0" err="1"/>
               <a:t>possiede</a:t>
             </a:r>
             <a:r>
-              <a:rPr lang="en-US" sz="1400" dirty="0"/>
+              <a:rPr lang="en-US" sz="1600" dirty="0"/>
               <a:t> </a:t>
             </a:r>
             <a:r>
-              <a:rPr lang="en-US" sz="1400" dirty="0" err="1"/>
+              <a:rPr lang="en-US" sz="1600" dirty="0" err="1"/>
               <a:t>diversi</a:t>
             </a:r>
             <a:r>
-              <a:rPr lang="en-US" sz="1400" dirty="0"/>
+              <a:rPr lang="en-US" sz="1600" dirty="0"/>
               <a:t> libri.</a:t>
             </a:r>
           </a:p>
           <a:p>
             <a:r>
-              <a:rPr lang="en-US" sz="1400" dirty="0"/>
+              <a:rPr lang="en-US" sz="1600" dirty="0"/>
               <a:t>Ogni </a:t>
             </a:r>
             <a:r>
-              <a:rPr lang="en-US" sz="1400" dirty="0" err="1"/>
+              <a:rPr lang="en-US" sz="1600" dirty="0" err="1"/>
               <a:t>libro</a:t>
             </a:r>
             <a:r>
-              <a:rPr lang="en-US" sz="1400" dirty="0"/>
+              <a:rPr lang="en-US" sz="1600" dirty="0"/>
               <a:t> </a:t>
             </a:r>
             <a:r>
-              <a:rPr lang="en-US" sz="1400" dirty="0" err="1"/>
+              <a:rPr lang="en-US" sz="1600" dirty="0" err="1"/>
               <a:t>è</a:t>
             </a:r>
             <a:r>
-              <a:rPr lang="en-US" sz="1400" dirty="0"/>
+              <a:rPr lang="en-US" sz="1600" dirty="0"/>
               <a:t> </a:t>
             </a:r>
             <a:r>
-              <a:rPr lang="en-US" sz="1400" dirty="0" err="1"/>
+              <a:rPr lang="en-US" sz="1600" dirty="0" err="1"/>
               <a:t>identificato</a:t>
             </a:r>
             <a:r>
-              <a:rPr lang="en-US" sz="1400" dirty="0"/>
+              <a:rPr lang="en-US" sz="1600" dirty="0"/>
               <a:t> da un </a:t>
             </a:r>
             <a:r>
-              <a:rPr lang="en-US" sz="1400" dirty="0" err="1"/>
+              <a:rPr lang="en-US" sz="1600" dirty="0" err="1"/>
               <a:t>codice</a:t>
             </a:r>
             <a:r>
-              <a:rPr lang="en-US" sz="1400" dirty="0"/>
+              <a:rPr lang="en-US" sz="1600" dirty="0"/>
               <a:t> ISBN, ha un </a:t>
             </a:r>
             <a:r>
-              <a:rPr lang="en-US" sz="1400" dirty="0" err="1"/>
+              <a:rPr lang="en-US" sz="1600" dirty="0" err="1"/>
               <a:t>titolo</a:t>
             </a:r>
             <a:r>
-              <a:rPr lang="en-US" sz="1400" dirty="0"/>
+              <a:rPr lang="en-US" sz="1600" dirty="0"/>
               <a:t>, un anno di </a:t>
             </a:r>
             <a:r>
-              <a:rPr lang="en-US" sz="1400" dirty="0" err="1"/>
+              <a:rPr lang="en-US" sz="1600" dirty="0" err="1"/>
               <a:t>pubblicazione</a:t>
             </a:r>
             <a:r>
-              <a:rPr lang="en-US" sz="1400" dirty="0"/>
+              <a:rPr lang="en-US" sz="1600" dirty="0"/>
               <a:t> e un </a:t>
             </a:r>
             <a:r>
-              <a:rPr lang="en-US" sz="1400" dirty="0" err="1"/>
+              <a:rPr lang="en-US" sz="1600" dirty="0" err="1"/>
               <a:t>editore</a:t>
             </a:r>
             <a:r>
-              <a:rPr lang="en-US" sz="1400" dirty="0"/>
+              <a:rPr lang="en-US" sz="1600" dirty="0"/>
               <a:t>.</a:t>
             </a:r>
           </a:p>
           <a:p>
             <a:r>
-              <a:rPr lang="en-US" sz="1400" dirty="0"/>
+              <a:rPr lang="en-US" sz="1600" dirty="0"/>
               <a:t>I libri </a:t>
             </a:r>
             <a:r>
-              <a:rPr lang="en-US" sz="1400" dirty="0" err="1"/>
+              <a:rPr lang="en-US" sz="1600" dirty="0" err="1"/>
               <a:t>sono</a:t>
             </a:r>
             <a:r>
-              <a:rPr lang="en-US" sz="1400" dirty="0"/>
+              <a:rPr lang="en-US" sz="1600" dirty="0"/>
               <a:t> </a:t>
             </a:r>
             <a:r>
-              <a:rPr lang="en-US" sz="1400" dirty="0" err="1"/>
+              <a:rPr lang="en-US" sz="1600" dirty="0" err="1"/>
               <a:t>scritti</a:t>
             </a:r>
             <a:r>
-              <a:rPr lang="en-US" sz="1400" dirty="0"/>
+              <a:rPr lang="en-US" sz="1600" dirty="0"/>
               <a:t> da uno o </a:t>
             </a:r>
             <a:r>
-              <a:rPr lang="en-US" sz="1400" dirty="0" err="1"/>
+              <a:rPr lang="en-US" sz="1600" dirty="0" err="1"/>
               <a:t>più</a:t>
             </a:r>
             <a:r>
-              <a:rPr lang="en-US" sz="1400" dirty="0"/>
+              <a:rPr lang="en-US" sz="1600" dirty="0"/>
               <a:t> </a:t>
             </a:r>
             <a:r>
-              <a:rPr lang="en-US" sz="1400" dirty="0" err="1"/>
+              <a:rPr lang="en-US" sz="1600" dirty="0" err="1"/>
               <a:t>autori</a:t>
             </a:r>
             <a:r>
-              <a:rPr lang="en-US" sz="1400" dirty="0"/>
+              <a:rPr lang="en-US" sz="1600" dirty="0"/>
               <a:t>.</a:t>
             </a:r>
           </a:p>
           <a:p>
             <a:r>
-              <a:rPr lang="en-US" sz="1400" dirty="0"/>
+              <a:rPr lang="en-US" sz="1600" dirty="0"/>
               <a:t>Per ogni </a:t>
             </a:r>
             <a:r>
-              <a:rPr lang="en-US" sz="1400" dirty="0" err="1"/>
+              <a:rPr lang="en-US" sz="1600" dirty="0" err="1"/>
               <a:t>autore</a:t>
             </a:r>
             <a:r>
-              <a:rPr lang="en-US" sz="1400" dirty="0"/>
+              <a:rPr lang="en-US" sz="1600" dirty="0"/>
               <a:t> </a:t>
             </a:r>
             <a:r>
-              <a:rPr lang="en-US" sz="1400" dirty="0" err="1"/>
+              <a:rPr lang="en-US" sz="1600" dirty="0" err="1"/>
               <a:t>si</a:t>
             </a:r>
             <a:r>
-              <a:rPr lang="en-US" sz="1400" dirty="0"/>
+              <a:rPr lang="en-US" sz="1600" dirty="0"/>
               <a:t> </a:t>
             </a:r>
             <a:r>
-              <a:rPr lang="en-US" sz="1400" dirty="0" err="1"/>
+              <a:rPr lang="en-US" sz="1600" dirty="0" err="1"/>
               <a:t>vogliono</a:t>
             </a:r>
             <a:r>
-              <a:rPr lang="en-US" sz="1400" dirty="0"/>
+              <a:rPr lang="en-US" sz="1600" dirty="0"/>
               <a:t> </a:t>
             </a:r>
             <a:r>
-              <a:rPr lang="en-US" sz="1400" dirty="0" err="1"/>
+              <a:rPr lang="en-US" sz="1600" dirty="0" err="1"/>
               <a:t>memorizzare</a:t>
             </a:r>
             <a:r>
-              <a:rPr lang="en-US" sz="1400" dirty="0"/>
+              <a:rPr lang="en-US" sz="1600" dirty="0"/>
               <a:t> </a:t>
             </a:r>
             <a:r>
-              <a:rPr lang="en-US" sz="1400" dirty="0" err="1"/>
+              <a:rPr lang="en-US" sz="1600" dirty="0" err="1"/>
               <a:t>nome</a:t>
             </a:r>
             <a:r>
-              <a:rPr lang="en-US" sz="1400" dirty="0"/>
+              <a:rPr lang="en-US" sz="1600" dirty="0"/>
               <a:t>, </a:t>
             </a:r>
             <a:r>
-              <a:rPr lang="en-US" sz="1400" dirty="0" err="1"/>
+              <a:rPr lang="en-US" sz="1600" dirty="0" err="1"/>
               <a:t>cognome</a:t>
             </a:r>
             <a:r>
-              <a:rPr lang="en-US" sz="1400" dirty="0"/>
+              <a:rPr lang="en-US" sz="1600" dirty="0"/>
               <a:t> e </a:t>
             </a:r>
             <a:r>
-              <a:rPr lang="en-US" sz="1400" dirty="0" err="1"/>
+              <a:rPr lang="en-US" sz="1600" dirty="0" err="1"/>
               <a:t>nazionalità</a:t>
             </a:r>
             <a:r>
-              <a:rPr lang="en-US" sz="1400" dirty="0"/>
+              <a:rPr lang="en-US" sz="1600" dirty="0"/>
               <a:t>.</a:t>
             </a:r>
           </a:p>
           <a:p>
             <a:r>
-              <a:rPr lang="en-US" sz="1400" dirty="0"/>
+              <a:rPr lang="en-US" sz="1600" dirty="0"/>
               <a:t>La </a:t>
             </a:r>
             <a:r>
-              <a:rPr lang="en-US" sz="1400" dirty="0" err="1"/>
+              <a:rPr lang="en-US" sz="1600" dirty="0" err="1"/>
               <a:t>biblioteca</a:t>
             </a:r>
             <a:r>
-              <a:rPr lang="en-US" sz="1400" dirty="0"/>
+              <a:rPr lang="en-US" sz="1600" dirty="0"/>
               <a:t> </a:t>
             </a:r>
             <a:r>
-              <a:rPr lang="en-US" sz="1400" dirty="0" err="1"/>
+              <a:rPr lang="en-US" sz="1600" dirty="0" err="1"/>
               <a:t>può</a:t>
             </a:r>
             <a:r>
-              <a:rPr lang="en-US" sz="1400" dirty="0"/>
+              <a:rPr lang="en-US" sz="1600" dirty="0"/>
               <a:t> </a:t>
             </a:r>
             <a:r>
-              <a:rPr lang="en-US" sz="1400" dirty="0" err="1"/>
+              <a:rPr lang="en-US" sz="1600" dirty="0" err="1"/>
               <a:t>avere</a:t>
             </a:r>
             <a:r>
-              <a:rPr lang="en-US" sz="1400" dirty="0"/>
+              <a:rPr lang="en-US" sz="1600" dirty="0"/>
               <a:t> </a:t>
             </a:r>
             <a:r>
-              <a:rPr lang="en-US" sz="1400" dirty="0" err="1"/>
+              <a:rPr lang="en-US" sz="1600" dirty="0" err="1"/>
               <a:t>più</a:t>
             </a:r>
             <a:r>
-              <a:rPr lang="en-US" sz="1400" dirty="0"/>
+              <a:rPr lang="en-US" sz="1600" dirty="0"/>
               <a:t> </a:t>
             </a:r>
             <a:r>
-              <a:rPr lang="en-US" sz="1400" dirty="0" err="1"/>
+              <a:rPr lang="en-US" sz="1600" dirty="0" err="1"/>
               <a:t>copie</a:t>
             </a:r>
             <a:r>
-              <a:rPr lang="en-US" sz="1400" dirty="0"/>
+              <a:rPr lang="en-US" sz="1600" dirty="0"/>
               <a:t> </a:t>
             </a:r>
             <a:r>
-              <a:rPr lang="en-US" sz="1400" dirty="0" err="1"/>
+              <a:rPr lang="en-US" sz="1600" dirty="0" err="1"/>
               <a:t>dello</a:t>
             </a:r>
             <a:r>
-              <a:rPr lang="en-US" sz="1400" dirty="0"/>
+              <a:rPr lang="en-US" sz="1600" dirty="0"/>
               <a:t> </a:t>
             </a:r>
             <a:r>
-              <a:rPr lang="en-US" sz="1400" dirty="0" err="1"/>
+              <a:rPr lang="en-US" sz="1600" dirty="0" err="1"/>
               <a:t>stesso</a:t>
             </a:r>
             <a:r>
-              <a:rPr lang="en-US" sz="1400" dirty="0"/>
+              <a:rPr lang="en-US" sz="1600" dirty="0"/>
               <a:t> </a:t>
             </a:r>
             <a:r>
-              <a:rPr lang="en-US" sz="1400" dirty="0" err="1"/>
+              <a:rPr lang="en-US" sz="1600" dirty="0" err="1"/>
               <a:t>libro</a:t>
             </a:r>
             <a:r>
-              <a:rPr lang="en-US" sz="1400" dirty="0"/>
+              <a:rPr lang="en-US" sz="1600" dirty="0"/>
               <a:t>.</a:t>
             </a:r>
           </a:p>
           <a:p>
             <a:r>
-              <a:rPr lang="en-US" sz="1400" dirty="0"/>
+              <a:rPr lang="en-US" sz="1600" dirty="0"/>
               <a:t>Ogni </a:t>
             </a:r>
             <a:r>
-              <a:rPr lang="en-US" sz="1400" dirty="0" err="1"/>
+              <a:rPr lang="en-US" sz="1600" dirty="0" err="1"/>
               <a:t>copia</a:t>
             </a:r>
             <a:r>
-              <a:rPr lang="en-US" sz="1400" dirty="0"/>
+              <a:rPr lang="en-US" sz="1600" dirty="0"/>
               <a:t> ha un </a:t>
             </a:r>
             <a:r>
-              <a:rPr lang="en-US" sz="1400" dirty="0" err="1"/>
+              <a:rPr lang="en-US" sz="1600" dirty="0" err="1"/>
               <a:t>codice</a:t>
             </a:r>
             <a:r>
-              <a:rPr lang="en-US" sz="1400" dirty="0"/>
+              <a:rPr lang="en-US" sz="1600" dirty="0"/>
               <a:t> </a:t>
             </a:r>
             <a:r>
-              <a:rPr lang="en-US" sz="1400" dirty="0" err="1"/>
+              <a:rPr lang="en-US" sz="1600" dirty="0" err="1"/>
               <a:t>identificativo</a:t>
             </a:r>
             <a:r>
-              <a:rPr lang="en-US" sz="1400" dirty="0"/>
+              <a:rPr lang="en-US" sz="1600" dirty="0"/>
               <a:t>, uno </a:t>
             </a:r>
             <a:r>
-              <a:rPr lang="en-US" sz="1400" dirty="0" err="1"/>
+              <a:rPr lang="en-US" sz="1600" dirty="0" err="1"/>
               <a:t>stato</a:t>
             </a:r>
             <a:r>
-              <a:rPr lang="en-US" sz="1400" dirty="0"/>
+              <a:rPr lang="en-US" sz="1600" dirty="0"/>
               <a:t> (</a:t>
             </a:r>
             <a:r>
-              <a:rPr lang="en-US" sz="1400" dirty="0" err="1"/>
+              <a:rPr lang="en-US" sz="1600" dirty="0" err="1"/>
               <a:t>disponibile</a:t>
             </a:r>
             <a:r>
-              <a:rPr lang="en-US" sz="1400" dirty="0"/>
+              <a:rPr lang="en-US" sz="1600" dirty="0"/>
               <a:t>, in </a:t>
             </a:r>
             <a:r>
-              <a:rPr lang="en-US" sz="1400" dirty="0" err="1"/>
+              <a:rPr lang="en-US" sz="1600" dirty="0" err="1"/>
               <a:t>prestito</a:t>
             </a:r>
             <a:r>
-              <a:rPr lang="en-US" sz="1400" dirty="0"/>
+              <a:rPr lang="en-US" sz="1600" dirty="0"/>
               <a:t>, </a:t>
             </a:r>
             <a:r>
-              <a:rPr lang="en-US" sz="1400" dirty="0" err="1"/>
+              <a:rPr lang="en-US" sz="1600" dirty="0" err="1"/>
               <a:t>danneggiato</a:t>
             </a:r>
             <a:r>
-              <a:rPr lang="en-US" sz="1400" dirty="0"/>
+              <a:rPr lang="en-US" sz="1600" dirty="0"/>
               <a:t>) e </a:t>
             </a:r>
             <a:r>
-              <a:rPr lang="en-US" sz="1400" dirty="0" err="1"/>
+              <a:rPr lang="en-US" sz="1600" dirty="0" err="1"/>
               <a:t>una</a:t>
             </a:r>
             <a:r>
-              <a:rPr lang="en-US" sz="1400" dirty="0"/>
+              <a:rPr lang="en-US" sz="1600" dirty="0"/>
               <a:t> </a:t>
             </a:r>
             <a:r>
-              <a:rPr lang="en-US" sz="1400" dirty="0" err="1"/>
+              <a:rPr lang="en-US" sz="1600" dirty="0" err="1"/>
               <a:t>posizione</a:t>
             </a:r>
             <a:r>
-              <a:rPr lang="en-US" sz="1400" dirty="0"/>
+              <a:rPr lang="en-US" sz="1600" dirty="0"/>
               <a:t> </a:t>
             </a:r>
             <a:r>
-              <a:rPr lang="en-US" sz="1400" dirty="0" err="1"/>
+              <a:rPr lang="en-US" sz="1600" dirty="0" err="1"/>
               <a:t>nello</a:t>
             </a:r>
             <a:r>
-              <a:rPr lang="en-US" sz="1400" dirty="0"/>
+              <a:rPr lang="en-US" sz="1600" dirty="0"/>
               <a:t> </a:t>
             </a:r>
             <a:r>
-              <a:rPr lang="en-US" sz="1400" dirty="0" err="1"/>
+              <a:rPr lang="en-US" sz="1600" dirty="0" err="1"/>
               <a:t>scaffale</a:t>
             </a:r>
             <a:r>
-              <a:rPr lang="en-US" sz="1400" dirty="0"/>
+              <a:rPr lang="en-US" sz="1600" dirty="0"/>
               <a:t>.</a:t>
             </a:r>
           </a:p>
@@ -17300,460 +17301,460 @@
           <a:lstStyle/>
           <a:p>
             <a:r>
-              <a:rPr lang="en-US" sz="1400" dirty="0" err="1"/>
+              <a:rPr lang="en-US" sz="1500" dirty="0" err="1"/>
               <a:t>Gli</a:t>
             </a:r>
             <a:r>
-              <a:rPr lang="en-US" sz="1400" dirty="0"/>
+              <a:rPr lang="en-US" sz="1500" dirty="0"/>
               <a:t> </a:t>
             </a:r>
             <a:r>
-              <a:rPr lang="en-US" sz="1400" dirty="0" err="1"/>
+              <a:rPr lang="en-US" sz="1500" dirty="0" err="1"/>
               <a:t>utenti</a:t>
             </a:r>
             <a:r>
-              <a:rPr lang="en-US" sz="1400" dirty="0"/>
+              <a:rPr lang="en-US" sz="1500" dirty="0"/>
               <a:t> della </a:t>
             </a:r>
             <a:r>
-              <a:rPr lang="en-US" sz="1400" dirty="0" err="1"/>
+              <a:rPr lang="en-US" sz="1500" dirty="0" err="1"/>
               <a:t>biblioteca</a:t>
             </a:r>
             <a:r>
-              <a:rPr lang="en-US" sz="1400" dirty="0"/>
+              <a:rPr lang="en-US" sz="1500" dirty="0"/>
               <a:t> </a:t>
             </a:r>
             <a:r>
-              <a:rPr lang="en-US" sz="1400" dirty="0" err="1"/>
+              <a:rPr lang="en-US" sz="1500" dirty="0" err="1"/>
               <a:t>possono</a:t>
             </a:r>
             <a:r>
-              <a:rPr lang="en-US" sz="1400" dirty="0"/>
+              <a:rPr lang="en-US" sz="1500" dirty="0"/>
               <a:t> </a:t>
             </a:r>
             <a:r>
-              <a:rPr lang="en-US" sz="1400" dirty="0" err="1"/>
+              <a:rPr lang="en-US" sz="1500" dirty="0" err="1"/>
               <a:t>prendere</a:t>
             </a:r>
             <a:r>
-              <a:rPr lang="en-US" sz="1400" dirty="0"/>
+              <a:rPr lang="en-US" sz="1500" dirty="0"/>
               <a:t> in </a:t>
             </a:r>
             <a:r>
-              <a:rPr lang="en-US" sz="1400" dirty="0" err="1"/>
+              <a:rPr lang="en-US" sz="1500" dirty="0" err="1"/>
               <a:t>prestito</a:t>
             </a:r>
             <a:r>
-              <a:rPr lang="en-US" sz="1400" dirty="0"/>
+              <a:rPr lang="en-US" sz="1500" dirty="0"/>
               <a:t> </a:t>
             </a:r>
             <a:r>
-              <a:rPr lang="en-US" sz="1400" dirty="0" err="1"/>
+              <a:rPr lang="en-US" sz="1500" dirty="0" err="1"/>
               <a:t>i</a:t>
             </a:r>
             <a:r>
-              <a:rPr lang="en-US" sz="1400" dirty="0"/>
+              <a:rPr lang="en-US" sz="1500" dirty="0"/>
               <a:t> libri.</a:t>
             </a:r>
           </a:p>
           <a:p>
             <a:r>
-              <a:rPr lang="en-US" sz="1400" dirty="0"/>
+              <a:rPr lang="en-US" sz="1500" dirty="0"/>
               <a:t>Per ogni </a:t>
             </a:r>
             <a:r>
-              <a:rPr lang="en-US" sz="1400" dirty="0" err="1"/>
+              <a:rPr lang="en-US" sz="1500" dirty="0" err="1"/>
               <a:t>utente</a:t>
             </a:r>
             <a:r>
-              <a:rPr lang="en-US" sz="1400" dirty="0"/>
+              <a:rPr lang="en-US" sz="1500" dirty="0"/>
               <a:t> </a:t>
             </a:r>
             <a:r>
-              <a:rPr lang="en-US" sz="1400" dirty="0" err="1"/>
+              <a:rPr lang="en-US" sz="1500" dirty="0" err="1"/>
               <a:t>si</a:t>
             </a:r>
             <a:r>
-              <a:rPr lang="en-US" sz="1400" dirty="0"/>
+              <a:rPr lang="en-US" sz="1500" dirty="0"/>
               <a:t> </a:t>
             </a:r>
             <a:r>
-              <a:rPr lang="en-US" sz="1400" dirty="0" err="1"/>
+              <a:rPr lang="en-US" sz="1500" dirty="0" err="1"/>
               <a:t>memorizzano</a:t>
             </a:r>
             <a:r>
-              <a:rPr lang="en-US" sz="1400" dirty="0"/>
+              <a:rPr lang="en-US" sz="1500" dirty="0"/>
               <a:t> </a:t>
             </a:r>
             <a:r>
-              <a:rPr lang="en-US" sz="1400" dirty="0" err="1"/>
+              <a:rPr lang="en-US" sz="1500" dirty="0" err="1"/>
               <a:t>numero</a:t>
             </a:r>
             <a:r>
-              <a:rPr lang="en-US" sz="1400" dirty="0"/>
+              <a:rPr lang="en-US" sz="1500" dirty="0"/>
               <a:t> </a:t>
             </a:r>
             <a:r>
-              <a:rPr lang="en-US" sz="1400" dirty="0" err="1"/>
+              <a:rPr lang="en-US" sz="1500" dirty="0" err="1"/>
               <a:t>tessera</a:t>
             </a:r>
             <a:r>
-              <a:rPr lang="en-US" sz="1400" dirty="0"/>
+              <a:rPr lang="en-US" sz="1500" dirty="0"/>
               <a:t>, </a:t>
             </a:r>
             <a:r>
-              <a:rPr lang="en-US" sz="1400" dirty="0" err="1"/>
+              <a:rPr lang="en-US" sz="1500" dirty="0" err="1"/>
               <a:t>nome</a:t>
             </a:r>
             <a:r>
-              <a:rPr lang="en-US" sz="1400" dirty="0"/>
+              <a:rPr lang="en-US" sz="1500" dirty="0"/>
               <a:t>, </a:t>
             </a:r>
             <a:r>
-              <a:rPr lang="en-US" sz="1400" dirty="0" err="1"/>
+              <a:rPr lang="en-US" sz="1500" dirty="0" err="1"/>
               <a:t>cognome</a:t>
             </a:r>
             <a:r>
-              <a:rPr lang="en-US" sz="1400" dirty="0"/>
+              <a:rPr lang="en-US" sz="1500" dirty="0"/>
               <a:t>, email e data di </a:t>
             </a:r>
             <a:r>
-              <a:rPr lang="en-US" sz="1400" dirty="0" err="1"/>
+              <a:rPr lang="en-US" sz="1500" dirty="0" err="1"/>
               <a:t>iscrizione</a:t>
             </a:r>
             <a:r>
-              <a:rPr lang="en-US" sz="1400" dirty="0"/>
+              <a:rPr lang="en-US" sz="1500" dirty="0"/>
               <a:t>.</a:t>
             </a:r>
           </a:p>
           <a:p>
             <a:r>
-              <a:rPr lang="en-US" sz="1400" dirty="0"/>
+              <a:rPr lang="en-US" sz="1500" dirty="0"/>
               <a:t>Quando un </a:t>
             </a:r>
             <a:r>
-              <a:rPr lang="en-US" sz="1400" dirty="0" err="1"/>
+              <a:rPr lang="en-US" sz="1500" dirty="0" err="1"/>
               <a:t>utente</a:t>
             </a:r>
             <a:r>
-              <a:rPr lang="en-US" sz="1400" dirty="0"/>
+              <a:rPr lang="en-US" sz="1500" dirty="0"/>
               <a:t> </a:t>
             </a:r>
             <a:r>
-              <a:rPr lang="en-US" sz="1400" dirty="0" err="1"/>
+              <a:rPr lang="en-US" sz="1500" dirty="0" err="1"/>
               <a:t>prende</a:t>
             </a:r>
             <a:r>
-              <a:rPr lang="en-US" sz="1400" dirty="0"/>
+              <a:rPr lang="en-US" sz="1500" dirty="0"/>
               <a:t> in </a:t>
             </a:r>
             <a:r>
-              <a:rPr lang="en-US" sz="1400" dirty="0" err="1"/>
+              <a:rPr lang="en-US" sz="1500" dirty="0" err="1"/>
               <a:t>prestito</a:t>
             </a:r>
             <a:r>
-              <a:rPr lang="en-US" sz="1400" dirty="0"/>
+              <a:rPr lang="en-US" sz="1500" dirty="0"/>
               <a:t> </a:t>
             </a:r>
             <a:r>
-              <a:rPr lang="en-US" sz="1400" dirty="0" err="1"/>
+              <a:rPr lang="en-US" sz="1500" dirty="0" err="1"/>
               <a:t>una</a:t>
             </a:r>
             <a:r>
-              <a:rPr lang="en-US" sz="1400" dirty="0"/>
+              <a:rPr lang="en-US" sz="1500" dirty="0"/>
               <a:t> </a:t>
             </a:r>
             <a:r>
-              <a:rPr lang="en-US" sz="1400" dirty="0" err="1"/>
+              <a:rPr lang="en-US" sz="1500" dirty="0" err="1"/>
               <a:t>copia</a:t>
             </a:r>
             <a:r>
-              <a:rPr lang="en-US" sz="1400" dirty="0"/>
+              <a:rPr lang="en-US" sz="1500" dirty="0"/>
               <a:t> di un </a:t>
             </a:r>
             <a:r>
-              <a:rPr lang="en-US" sz="1400" dirty="0" err="1"/>
+              <a:rPr lang="en-US" sz="1500" dirty="0" err="1"/>
               <a:t>libro</a:t>
             </a:r>
             <a:r>
-              <a:rPr lang="en-US" sz="1400" dirty="0"/>
+              <a:rPr lang="en-US" sz="1500" dirty="0"/>
               <a:t>, </a:t>
             </a:r>
             <a:r>
-              <a:rPr lang="en-US" sz="1400" dirty="0" err="1"/>
+              <a:rPr lang="en-US" sz="1500" dirty="0" err="1"/>
               <a:t>viene</a:t>
             </a:r>
             <a:r>
-              <a:rPr lang="en-US" sz="1400" dirty="0"/>
+              <a:rPr lang="en-US" sz="1500" dirty="0"/>
               <a:t> </a:t>
             </a:r>
             <a:r>
-              <a:rPr lang="en-US" sz="1400" dirty="0" err="1"/>
+              <a:rPr lang="en-US" sz="1500" dirty="0" err="1"/>
               <a:t>registrato</a:t>
             </a:r>
             <a:r>
-              <a:rPr lang="en-US" sz="1400" dirty="0"/>
+              <a:rPr lang="en-US" sz="1500" dirty="0"/>
               <a:t> un </a:t>
             </a:r>
             <a:r>
-              <a:rPr lang="en-US" sz="1400" dirty="0" err="1"/>
+              <a:rPr lang="en-US" sz="1500" dirty="0" err="1"/>
               <a:t>prestito</a:t>
             </a:r>
             <a:r>
-              <a:rPr lang="en-US" sz="1400" dirty="0"/>
+              <a:rPr lang="en-US" sz="1500" dirty="0"/>
               <a:t> con:</a:t>
             </a:r>
           </a:p>
           <a:p>
             <a:pPr lvl="1"/>
             <a:r>
-              <a:rPr lang="en-US" sz="1400" dirty="0"/>
+              <a:rPr lang="en-US" sz="1500" dirty="0"/>
               <a:t>data di </a:t>
             </a:r>
             <a:r>
-              <a:rPr lang="en-US" sz="1400" dirty="0" err="1"/>
+              <a:rPr lang="en-US" sz="1500" dirty="0" err="1"/>
               <a:t>inizio</a:t>
             </a:r>
             <a:r>
-              <a:rPr lang="en-US" sz="1400" dirty="0"/>
+              <a:rPr lang="en-US" sz="1500" dirty="0"/>
               <a:t> </a:t>
             </a:r>
             <a:r>
-              <a:rPr lang="en-US" sz="1400" dirty="0" err="1"/>
+              <a:rPr lang="en-US" sz="1500" dirty="0" err="1"/>
               <a:t>prestito</a:t>
             </a:r>
-            <a:endParaRPr lang="en-US" sz="1400" dirty="0"/>
+            <a:endParaRPr lang="en-US" sz="1500" dirty="0"/>
           </a:p>
           <a:p>
             <a:pPr lvl="1"/>
             <a:r>
-              <a:rPr lang="en-US" sz="1400" dirty="0"/>
+              <a:rPr lang="en-US" sz="1500" dirty="0"/>
               <a:t>data di </a:t>
             </a:r>
             <a:r>
-              <a:rPr lang="en-US" sz="1400" dirty="0" err="1"/>
+              <a:rPr lang="en-US" sz="1500" dirty="0" err="1"/>
               <a:t>scadenza</a:t>
             </a:r>
-            <a:endParaRPr lang="en-US" sz="1400" dirty="0"/>
+            <a:endParaRPr lang="en-US" sz="1500" dirty="0"/>
           </a:p>
           <a:p>
             <a:pPr lvl="1"/>
             <a:r>
-              <a:rPr lang="en-US" sz="1400" dirty="0"/>
+              <a:rPr lang="en-US" sz="1500" dirty="0"/>
               <a:t>data di </a:t>
             </a:r>
             <a:r>
-              <a:rPr lang="en-US" sz="1400" dirty="0" err="1"/>
+              <a:rPr lang="en-US" sz="1500" dirty="0" err="1"/>
               <a:t>restituzione</a:t>
             </a:r>
             <a:r>
-              <a:rPr lang="en-US" sz="1400" dirty="0"/>
+              <a:rPr lang="en-US" sz="1500" dirty="0"/>
               <a:t> (</a:t>
             </a:r>
             <a:r>
-              <a:rPr lang="en-US" sz="1400" dirty="0" err="1"/>
+              <a:rPr lang="en-US" sz="1500" dirty="0" err="1"/>
               <a:t>eventuale</a:t>
             </a:r>
             <a:r>
-              <a:rPr lang="en-US" sz="1400" dirty="0"/>
+              <a:rPr lang="en-US" sz="1500" dirty="0"/>
               <a:t>)</a:t>
             </a:r>
           </a:p>
           <a:p>
             <a:r>
-              <a:rPr lang="en-US" sz="1400" dirty="0"/>
+              <a:rPr lang="en-US" sz="1500" dirty="0"/>
               <a:t>La </a:t>
             </a:r>
             <a:r>
-              <a:rPr lang="en-US" sz="1400" dirty="0" err="1"/>
+              <a:rPr lang="en-US" sz="1500" dirty="0" err="1"/>
               <a:t>biblioteca</a:t>
             </a:r>
             <a:r>
-              <a:rPr lang="en-US" sz="1400" dirty="0"/>
+              <a:rPr lang="en-US" sz="1500" dirty="0"/>
               <a:t> </a:t>
             </a:r>
             <a:r>
-              <a:rPr lang="en-US" sz="1400" dirty="0" err="1"/>
+              <a:rPr lang="en-US" sz="1500" dirty="0" err="1"/>
               <a:t>organizza</a:t>
             </a:r>
             <a:r>
-              <a:rPr lang="en-US" sz="1400" dirty="0"/>
+              <a:rPr lang="en-US" sz="1500" dirty="0"/>
               <a:t> </a:t>
             </a:r>
             <a:r>
-              <a:rPr lang="en-US" sz="1400" dirty="0" err="1"/>
+              <a:rPr lang="en-US" sz="1500" dirty="0" err="1"/>
               <a:t>anche</a:t>
             </a:r>
             <a:r>
-              <a:rPr lang="en-US" sz="1400" dirty="0"/>
+              <a:rPr lang="en-US" sz="1500" dirty="0"/>
               <a:t> </a:t>
             </a:r>
             <a:r>
-              <a:rPr lang="en-US" sz="1400" dirty="0" err="1"/>
+              <a:rPr lang="en-US" sz="1500" dirty="0" err="1"/>
               <a:t>eventi</a:t>
             </a:r>
             <a:r>
-              <a:rPr lang="en-US" sz="1400" dirty="0"/>
+              <a:rPr lang="en-US" sz="1500" dirty="0"/>
               <a:t> </a:t>
             </a:r>
             <a:r>
-              <a:rPr lang="en-US" sz="1400" dirty="0" err="1"/>
+              <a:rPr lang="en-US" sz="1500" dirty="0" err="1"/>
               <a:t>culturali</a:t>
             </a:r>
             <a:r>
-              <a:rPr lang="en-US" sz="1400" dirty="0"/>
+              <a:rPr lang="en-US" sz="1500" dirty="0"/>
               <a:t> (</a:t>
             </a:r>
             <a:r>
-              <a:rPr lang="en-US" sz="1400" dirty="0" err="1"/>
+              <a:rPr lang="en-US" sz="1500" dirty="0" err="1"/>
               <a:t>presentazioni</a:t>
             </a:r>
             <a:r>
-              <a:rPr lang="en-US" sz="1400" dirty="0"/>
+              <a:rPr lang="en-US" sz="1500" dirty="0"/>
               <a:t> di libri, </a:t>
             </a:r>
             <a:r>
-              <a:rPr lang="en-US" sz="1400" dirty="0" err="1"/>
+              <a:rPr lang="en-US" sz="1500" dirty="0" err="1"/>
               <a:t>incontri</a:t>
             </a:r>
             <a:r>
-              <a:rPr lang="en-US" sz="1400" dirty="0"/>
+              <a:rPr lang="en-US" sz="1500" dirty="0"/>
               <a:t> con </a:t>
             </a:r>
             <a:r>
-              <a:rPr lang="en-US" sz="1400" dirty="0" err="1"/>
+              <a:rPr lang="en-US" sz="1500" dirty="0" err="1"/>
               <a:t>autori</a:t>
             </a:r>
             <a:r>
-              <a:rPr lang="en-US" sz="1400" dirty="0"/>
+              <a:rPr lang="en-US" sz="1500" dirty="0"/>
               <a:t>, </a:t>
             </a:r>
             <a:r>
-              <a:rPr lang="en-US" sz="1400" dirty="0" err="1"/>
+              <a:rPr lang="en-US" sz="1500" dirty="0" err="1"/>
               <a:t>seminari</a:t>
             </a:r>
             <a:r>
-              <a:rPr lang="en-US" sz="1400" dirty="0"/>
+              <a:rPr lang="en-US" sz="1500" dirty="0"/>
               <a:t>).</a:t>
             </a:r>
           </a:p>
           <a:p>
             <a:r>
-              <a:rPr lang="en-US" sz="1400" dirty="0"/>
+              <a:rPr lang="en-US" sz="1500" dirty="0"/>
               <a:t>Per ogni </a:t>
             </a:r>
             <a:r>
-              <a:rPr lang="en-US" sz="1400" dirty="0" err="1"/>
+              <a:rPr lang="en-US" sz="1500" dirty="0" err="1"/>
               <a:t>evento</a:t>
             </a:r>
             <a:r>
-              <a:rPr lang="en-US" sz="1400" dirty="0"/>
+              <a:rPr lang="en-US" sz="1500" dirty="0"/>
               <a:t> </a:t>
             </a:r>
             <a:r>
-              <a:rPr lang="en-US" sz="1400" dirty="0" err="1"/>
+              <a:rPr lang="en-US" sz="1500" dirty="0" err="1"/>
               <a:t>si</a:t>
             </a:r>
             <a:r>
-              <a:rPr lang="en-US" sz="1400" dirty="0"/>
+              <a:rPr lang="en-US" sz="1500" dirty="0"/>
               <a:t> </a:t>
             </a:r>
             <a:r>
-              <a:rPr lang="en-US" sz="1400" dirty="0" err="1"/>
+              <a:rPr lang="en-US" sz="1500" dirty="0" err="1"/>
               <a:t>memorizzano</a:t>
             </a:r>
             <a:r>
-              <a:rPr lang="en-US" sz="1400" dirty="0"/>
+              <a:rPr lang="en-US" sz="1500" dirty="0"/>
               <a:t> </a:t>
             </a:r>
             <a:r>
-              <a:rPr lang="en-US" sz="1400" dirty="0" err="1"/>
+              <a:rPr lang="en-US" sz="1500" dirty="0" err="1"/>
               <a:t>titolo</a:t>
             </a:r>
             <a:r>
-              <a:rPr lang="en-US" sz="1400" dirty="0"/>
+              <a:rPr lang="en-US" sz="1500" dirty="0"/>
               <a:t>, data, </a:t>
             </a:r>
             <a:r>
-              <a:rPr lang="en-US" sz="1400" dirty="0" err="1"/>
+              <a:rPr lang="en-US" sz="1500" dirty="0" err="1"/>
               <a:t>orario</a:t>
             </a:r>
             <a:r>
-              <a:rPr lang="en-US" sz="1400" dirty="0"/>
+              <a:rPr lang="en-US" sz="1500" dirty="0"/>
               <a:t>, sala e </a:t>
             </a:r>
             <a:r>
-              <a:rPr lang="en-US" sz="1400" dirty="0" err="1"/>
+              <a:rPr lang="en-US" sz="1500" dirty="0" err="1"/>
               <a:t>numero</a:t>
             </a:r>
             <a:r>
-              <a:rPr lang="en-US" sz="1400" dirty="0"/>
+              <a:rPr lang="en-US" sz="1500" dirty="0"/>
               <a:t> </a:t>
             </a:r>
             <a:r>
-              <a:rPr lang="en-US" sz="1400" dirty="0" err="1"/>
+              <a:rPr lang="en-US" sz="1500" dirty="0" err="1"/>
               <a:t>massimo</a:t>
             </a:r>
             <a:r>
-              <a:rPr lang="en-US" sz="1400" dirty="0"/>
+              <a:rPr lang="en-US" sz="1500" dirty="0"/>
               <a:t> di </a:t>
             </a:r>
             <a:r>
-              <a:rPr lang="en-US" sz="1400" dirty="0" err="1"/>
+              <a:rPr lang="en-US" sz="1500" dirty="0" err="1"/>
               <a:t>partecipanti</a:t>
             </a:r>
             <a:r>
-              <a:rPr lang="en-US" sz="1400" dirty="0"/>
+              <a:rPr lang="en-US" sz="1500" dirty="0"/>
               <a:t>.</a:t>
             </a:r>
           </a:p>
           <a:p>
             <a:r>
-              <a:rPr lang="en-US" sz="1400" dirty="0" err="1"/>
+              <a:rPr lang="en-US" sz="1500" dirty="0" err="1"/>
               <a:t>Gli</a:t>
             </a:r>
             <a:r>
-              <a:rPr lang="en-US" sz="1400" dirty="0"/>
+              <a:rPr lang="en-US" sz="1500" dirty="0"/>
               <a:t> </a:t>
             </a:r>
             <a:r>
-              <a:rPr lang="en-US" sz="1400" dirty="0" err="1"/>
+              <a:rPr lang="en-US" sz="1500" dirty="0" err="1"/>
               <a:t>utenti</a:t>
             </a:r>
             <a:r>
-              <a:rPr lang="en-US" sz="1400" dirty="0"/>
+              <a:rPr lang="en-US" sz="1500" dirty="0"/>
               <a:t> </a:t>
             </a:r>
             <a:r>
-              <a:rPr lang="en-US" sz="1400" dirty="0" err="1"/>
+              <a:rPr lang="en-US" sz="1500" dirty="0" err="1"/>
               <a:t>possono</a:t>
             </a:r>
             <a:r>
-              <a:rPr lang="en-US" sz="1400" dirty="0"/>
+              <a:rPr lang="en-US" sz="1500" dirty="0"/>
               <a:t> </a:t>
             </a:r>
             <a:r>
-              <a:rPr lang="en-US" sz="1400" dirty="0" err="1"/>
+              <a:rPr lang="en-US" sz="1500" dirty="0" err="1"/>
               <a:t>iscriversi</a:t>
             </a:r>
             <a:r>
-              <a:rPr lang="en-US" sz="1400" dirty="0"/>
+              <a:rPr lang="en-US" sz="1500" dirty="0"/>
               <a:t> </a:t>
             </a:r>
             <a:r>
-              <a:rPr lang="en-US" sz="1400" dirty="0" err="1"/>
+              <a:rPr lang="en-US" sz="1500" dirty="0" err="1"/>
               <a:t>agli</a:t>
             </a:r>
             <a:r>
-              <a:rPr lang="en-US" sz="1400" dirty="0"/>
+              <a:rPr lang="en-US" sz="1500" dirty="0"/>
               <a:t> </a:t>
             </a:r>
             <a:r>
-              <a:rPr lang="en-US" sz="1400" dirty="0" err="1"/>
+              <a:rPr lang="en-US" sz="1500" dirty="0" err="1"/>
               <a:t>eventi</a:t>
             </a:r>
             <a:r>
-              <a:rPr lang="en-US" sz="1400" dirty="0"/>
+              <a:rPr lang="en-US" sz="1500" dirty="0"/>
               <a:t>.</a:t>
             </a:r>
           </a:p>
@@ -22759,7 +22760,34 @@
                 </a:solidFill>
                 <a:ea typeface="ＭＳ Ｐゴシック" panose="020B0600070205080204" pitchFamily="34" charset="-128"/>
               </a:rPr>
-              <a:t>A partial key of the weak entity type</a:t>
+              <a:t>A </a:t>
+            </a:r>
+            <a:r>
+              <a:rPr lang="en-US" altLang="en-IT" sz="1800" b="1" dirty="0">
+                <a:solidFill>
+                  <a:srgbClr val="00B050"/>
+                </a:solidFill>
+                <a:ea typeface="ＭＳ Ｐゴシック" panose="020B0600070205080204" pitchFamily="34" charset="-128"/>
+              </a:rPr>
+              <a:t>partial key</a:t>
+            </a:r>
+            <a:r>
+              <a:rPr lang="en-US" altLang="en-IT" sz="1800" dirty="0">
+                <a:solidFill>
+                  <a:srgbClr val="00B050"/>
+                </a:solidFill>
+                <a:ea typeface="ＭＳ Ｐゴシック" panose="020B0600070205080204" pitchFamily="34" charset="-128"/>
+              </a:rPr>
+              <a:t> </a:t>
+            </a:r>
+            <a:r>
+              <a:rPr lang="en-US" altLang="en-IT" sz="1800" dirty="0">
+                <a:solidFill>
+                  <a:schemeClr val="tx1"/>
+                </a:solidFill>
+                <a:ea typeface="ＭＳ Ｐゴシック" panose="020B0600070205080204" pitchFamily="34" charset="-128"/>
+              </a:rPr>
+              <a:t>of the weak entity type</a:t>
             </a:r>
           </a:p>
           <a:p>
@@ -22775,7 +22803,43 @@
                 </a:solidFill>
                 <a:ea typeface="ＭＳ Ｐゴシック" panose="020B0600070205080204" pitchFamily="34" charset="-128"/>
               </a:rPr>
-              <a:t>The particular entity they are related to in the identifying relationship  type</a:t>
+              <a:t>The </a:t>
+            </a:r>
+            <a:r>
+              <a:rPr lang="en-US" altLang="en-IT" sz="1800" dirty="0">
+                <a:solidFill>
+                  <a:srgbClr val="00B050"/>
+                </a:solidFill>
+                <a:ea typeface="ＭＳ Ｐゴシック" panose="020B0600070205080204" pitchFamily="34" charset="-128"/>
+              </a:rPr>
+              <a:t>particular entity</a:t>
+            </a:r>
+            <a:r>
+              <a:rPr lang="en-US" altLang="en-IT" sz="1800" dirty="0">
+                <a:solidFill>
+                  <a:schemeClr val="tx1"/>
+                </a:solidFill>
+                <a:ea typeface="ＭＳ Ｐゴシック" panose="020B0600070205080204" pitchFamily="34" charset="-128"/>
+              </a:rPr>
+              <a:t> they are related to in the </a:t>
+            </a:r>
+            <a:r>
+              <a:rPr lang="en-US" altLang="en-IT" sz="1800" b="1" dirty="0">
+                <a:solidFill>
+                  <a:srgbClr val="00B050"/>
+                </a:solidFill>
+                <a:ea typeface="ＭＳ Ｐゴシック" panose="020B0600070205080204" pitchFamily="34" charset="-128"/>
+              </a:rPr>
+              <a:t>identifying relationship  </a:t>
+            </a:r>
+            <a:r>
+              <a:rPr lang="en-US" altLang="en-IT" sz="1800" dirty="0">
+                <a:solidFill>
+                  <a:schemeClr val="tx1"/>
+                </a:solidFill>
+                <a:ea typeface="ＭＳ Ｐゴシック" panose="020B0600070205080204" pitchFamily="34" charset="-128"/>
+              </a:rPr>
+              <a:t>type</a:t>
             </a:r>
           </a:p>
           <a:p>
@@ -23001,7 +23065,22 @@
               <a:rPr lang="en-US" altLang="en-IT" dirty="0">
                 <a:ea typeface="ＭＳ Ｐゴシック" panose="020B0600070205080204" pitchFamily="34" charset="-128"/>
               </a:rPr>
-              <a:t>A relationship type can have attributes:</a:t>
+              <a:t>A relationship type can have </a:t>
+            </a:r>
+            <a:r>
+              <a:rPr lang="en-US" altLang="en-IT" b="1" dirty="0">
+                <a:solidFill>
+                  <a:srgbClr val="FFC000"/>
+                </a:solidFill>
+                <a:ea typeface="ＭＳ Ｐゴシック" panose="020B0600070205080204" pitchFamily="34" charset="-128"/>
+              </a:rPr>
+              <a:t>attributes</a:t>
+            </a:r>
+            <a:r>
+              <a:rPr lang="en-US" altLang="en-IT" dirty="0">
+                <a:ea typeface="ＭＳ Ｐゴシック" panose="020B0600070205080204" pitchFamily="34" charset="-128"/>
+              </a:rPr>
+              <a:t>:</a:t>
             </a:r>
           </a:p>
           <a:p>
@@ -23012,18 +23091,27 @@
             </a:pPr>
             <a:r>
               <a:rPr lang="en-US" altLang="en-IT" dirty="0">
+                <a:solidFill>
+                  <a:schemeClr val="tx1"/>
+                </a:solidFill>
                 <a:ea typeface="ＭＳ Ｐゴシック" panose="020B0600070205080204" pitchFamily="34" charset="-128"/>
               </a:rPr>
               <a:t>For example, </a:t>
             </a:r>
             <a:r>
               <a:rPr lang="en-US" altLang="en-IT" dirty="0" err="1">
+                <a:solidFill>
+                  <a:schemeClr val="tx1"/>
+                </a:solidFill>
                 <a:ea typeface="ＭＳ Ｐゴシック" panose="020B0600070205080204" pitchFamily="34" charset="-128"/>
               </a:rPr>
               <a:t>HoursPerWeek</a:t>
             </a:r>
             <a:r>
               <a:rPr lang="en-US" altLang="en-IT" dirty="0">
+                <a:solidFill>
+                  <a:schemeClr val="tx1"/>
+                </a:solidFill>
                 <a:ea typeface="ＭＳ Ｐゴシック" panose="020B0600070205080204" pitchFamily="34" charset="-128"/>
               </a:rPr>
               <a:t> of WORKS_ON</a:t>
@@ -23037,6 +23125,9 @@
             </a:pPr>
             <a:r>
               <a:rPr lang="en-US" altLang="en-IT" dirty="0">
+                <a:solidFill>
+                  <a:schemeClr val="tx1"/>
+                </a:solidFill>
                 <a:ea typeface="ＭＳ Ｐゴシック" panose="020B0600070205080204" pitchFamily="34" charset="-128"/>
               </a:rPr>
               <a:t>Its value for each relationship instance describes the number of hours per week that an EMPLOYEE works on a PROJECT.</a:t>
@@ -23050,6 +23141,9 @@
             </a:pPr>
             <a:r>
               <a:rPr lang="en-US" altLang="en-IT" dirty="0">
+                <a:solidFill>
+                  <a:schemeClr val="tx1"/>
+                </a:solidFill>
                 <a:ea typeface="ＭＳ Ｐゴシック" panose="020B0600070205080204" pitchFamily="34" charset="-128"/>
               </a:rPr>
               <a:t>A value of </a:t>
@@ -23057,10 +23151,7 @@
             <a:r>
               <a:rPr lang="en-US" altLang="en-IT" b="1" dirty="0" err="1">
                 <a:solidFill>
-                  <a:schemeClr val="accent5">
-                    <a:lumMod val="60000"/>
-                    <a:lumOff val="40000"/>
-                  </a:schemeClr>
+                  <a:schemeClr val="tx1"/>
                 </a:solidFill>
                 <a:ea typeface="ＭＳ Ｐゴシック" panose="020B0600070205080204" pitchFamily="34" charset="-128"/>
               </a:rPr>
@@ -23068,6 +23159,9 @@
             </a:r>
             <a:r>
               <a:rPr lang="en-US" altLang="en-IT" dirty="0">
+                <a:solidFill>
+                  <a:schemeClr val="tx1"/>
+                </a:solidFill>
                 <a:ea typeface="ＭＳ Ｐゴシック" panose="020B0600070205080204" pitchFamily="34" charset="-128"/>
               </a:rPr>
               <a:t> depends on a particular (employee, project) combination</a:t>
@@ -23080,7 +23174,10 @@
               </a:lnSpc>
             </a:pPr>
             <a:r>
-              <a:rPr lang="en-US" altLang="en-IT" dirty="0">
+              <a:rPr lang="en-US" altLang="en-IT" u="sng" dirty="0">
+                <a:solidFill>
+                  <a:schemeClr val="tx1"/>
+                </a:solidFill>
                 <a:ea typeface="ＭＳ Ｐゴシック" panose="020B0600070205080204" pitchFamily="34" charset="-128"/>
               </a:rPr>
               <a:t>Most relationship attributes are used with M:N relationships</a:t>
@@ -23096,7 +23193,61 @@
               <a:rPr lang="en-US" altLang="en-IT" dirty="0">
                 <a:ea typeface="ＭＳ Ｐゴシック" panose="020B0600070205080204" pitchFamily="34" charset="-128"/>
               </a:rPr>
-              <a:t>In 1:N relationships, they can be transferred to the entity type on the N-side of the relationship</a:t>
+              <a:t>In </a:t>
+            </a:r>
+            <a:r>
+              <a:rPr lang="en-US" altLang="en-IT" dirty="0">
+                <a:solidFill>
+                  <a:schemeClr val="accent5">
+                    <a:lumMod val="60000"/>
+                    <a:lumOff val="40000"/>
+                  </a:schemeClr>
+                </a:solidFill>
+                <a:ea typeface="ＭＳ Ｐゴシック" panose="020B0600070205080204" pitchFamily="34" charset="-128"/>
+              </a:rPr>
+              <a:t>1:N</a:t>
+            </a:r>
+            <a:r>
+              <a:rPr lang="en-US" altLang="en-IT" dirty="0">
+                <a:ea typeface="ＭＳ Ｐゴシック" panose="020B0600070205080204" pitchFamily="34" charset="-128"/>
+              </a:rPr>
+              <a:t> relationships, they can be </a:t>
+            </a:r>
+            <a:r>
+              <a:rPr lang="en-US" altLang="en-IT" dirty="0">
+                <a:solidFill>
+                  <a:schemeClr val="accent5">
+                    <a:lumMod val="60000"/>
+                    <a:lumOff val="40000"/>
+                  </a:schemeClr>
+                </a:solidFill>
+                <a:ea typeface="ＭＳ Ｐゴシック" panose="020B0600070205080204" pitchFamily="34" charset="-128"/>
+              </a:rPr>
+              <a:t>transferred</a:t>
+            </a:r>
+            <a:r>
+              <a:rPr lang="en-US" altLang="en-IT" dirty="0">
+                <a:ea typeface="ＭＳ Ｐゴシック" panose="020B0600070205080204" pitchFamily="34" charset="-128"/>
+              </a:rPr>
+              <a:t> to the entity type on the </a:t>
+            </a:r>
+            <a:r>
+              <a:rPr lang="en-US" altLang="en-IT" dirty="0">
+                <a:solidFill>
+                  <a:schemeClr val="accent5">
+                    <a:lumMod val="60000"/>
+                    <a:lumOff val="40000"/>
+                  </a:schemeClr>
+                </a:solidFill>
+                <a:ea typeface="ＭＳ Ｐゴシック" panose="020B0600070205080204" pitchFamily="34" charset="-128"/>
+              </a:rPr>
+              <a:t>N-side</a:t>
+            </a:r>
+            <a:r>
+              <a:rPr lang="en-US" altLang="en-IT" dirty="0">
+                <a:ea typeface="ＭＳ Ｐゴシック" panose="020B0600070205080204" pitchFamily="34" charset="-128"/>
+              </a:rPr>
+              <a:t> of the relationship</a:t>
             </a:r>
           </a:p>
         </p:txBody>
@@ -24057,15 +24208,15 @@
       </p:grpSpPr>
       <p:sp>
         <p:nvSpPr>
-          <p:cNvPr id="91138" name="Rectangle 2">
+          <p:cNvPr id="2" name="Title 1">
             <a:extLst>
               <a:ext uri="{FF2B5EF4-FFF2-40B4-BE49-F238E27FC236}">
-                <a16:creationId xmlns:a16="http://schemas.microsoft.com/office/drawing/2014/main" id="{6B373D79-F67B-F01B-01DD-F2F9EA3E8F1F}"/>
+                <a16:creationId xmlns:a16="http://schemas.microsoft.com/office/drawing/2014/main" id="{85386E39-EFC6-C770-57B7-DD6E13590B64}"/>
               </a:ext>
             </a:extLst>
           </p:cNvPr>
           <p:cNvSpPr>
-            <a:spLocks noGrp="1" noChangeArrowheads="1"/>
+            <a:spLocks noGrp="1"/>
           </p:cNvSpPr>
           <p:nvPr>
             <p:ph type="title"/>
@@ -24076,71 +24227,700 @@
           <a:bodyPr/>
           <a:lstStyle/>
           <a:p>
-            <a:pPr eaLnBrk="1" hangingPunct="1"/>
-            <a:r>
-              <a:rPr lang="en-US" altLang="en-IT">
-                <a:ea typeface="ＭＳ Ｐゴシック" panose="020B0600070205080204" pitchFamily="34" charset="-128"/>
-              </a:rPr>
-              <a:t>Alternative diagrammatic notation</a:t>
-            </a:r>
+            <a:r>
+              <a:rPr lang="en-US" sz="2800" dirty="0"/>
+              <a:t>Ex: </a:t>
+            </a:r>
+            <a:r>
+              <a:rPr lang="en-US" sz="2800" dirty="0" err="1"/>
+              <a:t>Piattaforma</a:t>
+            </a:r>
+            <a:r>
+              <a:rPr lang="en-US" sz="2800" dirty="0"/>
+              <a:t> </a:t>
+            </a:r>
+            <a:r>
+              <a:rPr lang="en-US" sz="2800" dirty="0" err="1"/>
+              <a:t>universitaria</a:t>
+            </a:r>
+            <a:r>
+              <a:rPr lang="en-US" sz="2800" dirty="0"/>
+              <a:t> di </a:t>
+            </a:r>
+            <a:r>
+              <a:rPr lang="en-US" sz="2800" dirty="0" err="1"/>
+              <a:t>tirocini</a:t>
+            </a:r>
+            <a:endParaRPr lang="en-US" sz="2800" dirty="0"/>
           </a:p>
         </p:txBody>
       </p:sp>
       <p:sp>
         <p:nvSpPr>
-          <p:cNvPr id="91139" name="Rectangle 3">
+          <p:cNvPr id="3" name="Content Placeholder 2">
             <a:extLst>
               <a:ext uri="{FF2B5EF4-FFF2-40B4-BE49-F238E27FC236}">
-                <a16:creationId xmlns:a16="http://schemas.microsoft.com/office/drawing/2014/main" id="{CBAFB15E-61DE-795D-D6F1-A5160A07A755}"/>
+                <a16:creationId xmlns:a16="http://schemas.microsoft.com/office/drawing/2014/main" id="{281BDD61-471C-AD4F-DB8F-4D601CC70BAC}"/>
               </a:ext>
             </a:extLst>
           </p:cNvPr>
           <p:cNvSpPr>
-            <a:spLocks noGrp="1" noChangeArrowheads="1"/>
+            <a:spLocks noGrp="1"/>
           </p:cNvSpPr>
           <p:nvPr>
             <p:ph idx="1"/>
           </p:nvPr>
         </p:nvSpPr>
-        <p:spPr>
-          <a:xfrm>
-            <a:off x="239713" y="1600200"/>
-            <a:ext cx="8294687" cy="3581400"/>
-          </a:xfrm>
-        </p:spPr>
+        <p:spPr/>
         <p:txBody>
           <a:bodyPr/>
           <a:lstStyle/>
           <a:p>
-            <a:pPr eaLnBrk="1" hangingPunct="1"/>
-            <a:r>
-              <a:rPr lang="en-US" altLang="en-IT">
-                <a:ea typeface="ＭＳ Ｐゴシック" panose="020B0600070205080204" pitchFamily="34" charset="-128"/>
-              </a:rPr>
-              <a:t>ER diagrams is one popular example for displaying database schemas</a:t>
-            </a:r>
-          </a:p>
-          <a:p>
-            <a:pPr eaLnBrk="1" hangingPunct="1"/>
-            <a:r>
-              <a:rPr lang="en-US" altLang="en-IT">
-                <a:ea typeface="ＭＳ Ｐゴシック" panose="020B0600070205080204" pitchFamily="34" charset="-128"/>
-              </a:rPr>
-              <a:t>Many other notations exist in the literature and in various database design and modeling tools</a:t>
-            </a:r>
-          </a:p>
-          <a:p>
-            <a:pPr eaLnBrk="1" hangingPunct="1"/>
-            <a:r>
-              <a:rPr lang="en-US" altLang="en-IT">
-                <a:ea typeface="ＭＳ Ｐゴシック" panose="020B0600070205080204" pitchFamily="34" charset="-128"/>
-              </a:rPr>
-              <a:t>UML class diagrams is representative of another way of displaying ER concepts that is used in several commercial design tools</a:t>
-            </a:r>
+            <a:pPr marL="0" indent="0">
+              <a:buNone/>
+            </a:pPr>
+            <a:r>
+              <a:rPr lang="en-GB" sz="1600" dirty="0" err="1"/>
+              <a:t>Progettare</a:t>
+            </a:r>
+            <a:r>
+              <a:rPr lang="en-GB" sz="1600" dirty="0"/>
+              <a:t> lo schema ER di un </a:t>
+            </a:r>
+            <a:r>
+              <a:rPr lang="en-GB" sz="1600" dirty="0" err="1"/>
+              <a:t>sistema</a:t>
+            </a:r>
+            <a:r>
+              <a:rPr lang="en-GB" sz="1600" dirty="0"/>
+              <a:t> per la </a:t>
+            </a:r>
+            <a:r>
+              <a:rPr lang="en-GB" sz="1600" dirty="0" err="1"/>
+              <a:t>gestione</a:t>
+            </a:r>
+            <a:r>
+              <a:rPr lang="en-GB" sz="1600" dirty="0"/>
+              <a:t> </a:t>
+            </a:r>
+            <a:r>
+              <a:rPr lang="en-GB" sz="1600" dirty="0" err="1"/>
+              <a:t>dei</a:t>
+            </a:r>
+            <a:r>
+              <a:rPr lang="en-GB" sz="1600" dirty="0"/>
+              <a:t> </a:t>
+            </a:r>
+            <a:r>
+              <a:rPr lang="en-GB" sz="1600" dirty="0" err="1"/>
+              <a:t>tirocini</a:t>
+            </a:r>
+            <a:r>
+              <a:rPr lang="en-GB" sz="1600" dirty="0"/>
+              <a:t> </a:t>
+            </a:r>
+            <a:r>
+              <a:rPr lang="en-GB" sz="1600" dirty="0" err="1"/>
+              <a:t>universitari</a:t>
+            </a:r>
+            <a:r>
+              <a:rPr lang="en-GB" sz="1600" dirty="0"/>
+              <a:t>. Il </a:t>
+            </a:r>
+            <a:r>
+              <a:rPr lang="en-GB" sz="1600" dirty="0" err="1"/>
+              <a:t>sistema</a:t>
+            </a:r>
+            <a:r>
+              <a:rPr lang="en-GB" sz="1600" dirty="0"/>
+              <a:t> </a:t>
+            </a:r>
+            <a:r>
+              <a:rPr lang="en-GB" sz="1600" dirty="0" err="1"/>
+              <a:t>deve</a:t>
+            </a:r>
+            <a:r>
+              <a:rPr lang="en-GB" sz="1600" dirty="0"/>
+              <a:t> </a:t>
+            </a:r>
+            <a:r>
+              <a:rPr lang="en-GB" sz="1600" dirty="0" err="1"/>
+              <a:t>gestire</a:t>
+            </a:r>
+            <a:r>
+              <a:rPr lang="en-GB" sz="1600" dirty="0"/>
+              <a:t> </a:t>
+            </a:r>
+            <a:r>
+              <a:rPr lang="en-GB" sz="1600" dirty="0" err="1"/>
+              <a:t>studenti</a:t>
+            </a:r>
+            <a:r>
+              <a:rPr lang="en-GB" sz="1600" dirty="0"/>
+              <a:t>, </a:t>
+            </a:r>
+            <a:r>
+              <a:rPr lang="en-GB" sz="1600" dirty="0" err="1"/>
+              <a:t>aziende</a:t>
+            </a:r>
+            <a:r>
+              <a:rPr lang="en-GB" sz="1600" dirty="0"/>
+              <a:t>, tutor </a:t>
+            </a:r>
+            <a:r>
+              <a:rPr lang="en-GB" sz="1600" dirty="0" err="1"/>
+              <a:t>accademici</a:t>
+            </a:r>
+            <a:r>
+              <a:rPr lang="en-GB" sz="1600" dirty="0"/>
+              <a:t>, tutor </a:t>
+            </a:r>
+            <a:r>
+              <a:rPr lang="en-GB" sz="1600" dirty="0" err="1"/>
+              <a:t>aziendali</a:t>
+            </a:r>
+            <a:r>
+              <a:rPr lang="en-GB" sz="1600" dirty="0"/>
+              <a:t>, </a:t>
+            </a:r>
+            <a:r>
+              <a:rPr lang="en-GB" sz="1600" dirty="0" err="1"/>
+              <a:t>progetti</a:t>
+            </a:r>
+            <a:r>
+              <a:rPr lang="en-GB" sz="1600" dirty="0"/>
+              <a:t> di </a:t>
+            </a:r>
+            <a:r>
+              <a:rPr lang="en-GB" sz="1600" dirty="0" err="1"/>
+              <a:t>tirocinio</a:t>
+            </a:r>
+            <a:r>
+              <a:rPr lang="en-GB" sz="1600" dirty="0"/>
+              <a:t>, candidature, </a:t>
+            </a:r>
+            <a:r>
+              <a:rPr lang="en-GB" sz="1600" dirty="0" err="1"/>
+              <a:t>tirocini</a:t>
+            </a:r>
+            <a:r>
+              <a:rPr lang="en-GB" sz="1600" dirty="0"/>
+              <a:t> </a:t>
+            </a:r>
+            <a:r>
+              <a:rPr lang="en-GB" sz="1600" dirty="0" err="1"/>
+              <a:t>attivati</a:t>
+            </a:r>
+            <a:r>
+              <a:rPr lang="en-GB" sz="1600" dirty="0"/>
+              <a:t> e report </a:t>
+            </a:r>
+            <a:r>
+              <a:rPr lang="en-GB" sz="1600" dirty="0" err="1"/>
+              <a:t>settimanali</a:t>
+            </a:r>
+            <a:r>
+              <a:rPr lang="en-GB" sz="1600" dirty="0"/>
+              <a:t>. Ogni </a:t>
+            </a:r>
+            <a:r>
+              <a:rPr lang="en-GB" sz="1600" dirty="0" err="1"/>
+              <a:t>azienda</a:t>
+            </a:r>
+            <a:r>
+              <a:rPr lang="en-GB" sz="1600" dirty="0"/>
+              <a:t> </a:t>
+            </a:r>
+            <a:r>
+              <a:rPr lang="en-GB" sz="1600" dirty="0" err="1"/>
+              <a:t>propone</a:t>
+            </a:r>
+            <a:r>
+              <a:rPr lang="en-GB" sz="1600" dirty="0"/>
+              <a:t> </a:t>
+            </a:r>
+            <a:r>
+              <a:rPr lang="en-GB" sz="1600" dirty="0" err="1"/>
+              <a:t>progetti</a:t>
+            </a:r>
+            <a:r>
+              <a:rPr lang="en-GB" sz="1600" dirty="0"/>
+              <a:t>; </a:t>
+            </a:r>
+            <a:r>
+              <a:rPr lang="en-GB" sz="1600" dirty="0" err="1"/>
+              <a:t>gli</a:t>
+            </a:r>
+            <a:r>
+              <a:rPr lang="en-GB" sz="1600" dirty="0"/>
+              <a:t> </a:t>
+            </a:r>
+            <a:r>
+              <a:rPr lang="en-GB" sz="1600" dirty="0" err="1"/>
+              <a:t>studenti</a:t>
+            </a:r>
+            <a:r>
+              <a:rPr lang="en-GB" sz="1600" dirty="0"/>
+              <a:t> </a:t>
+            </a:r>
+            <a:r>
+              <a:rPr lang="en-GB" sz="1600" dirty="0" err="1"/>
+              <a:t>si</a:t>
+            </a:r>
+            <a:r>
+              <a:rPr lang="en-GB" sz="1600" dirty="0"/>
+              <a:t> </a:t>
+            </a:r>
+            <a:r>
+              <a:rPr lang="en-GB" sz="1600" dirty="0" err="1"/>
+              <a:t>candidano</a:t>
+            </a:r>
+            <a:r>
+              <a:rPr lang="en-GB" sz="1600" dirty="0"/>
+              <a:t> ai </a:t>
+            </a:r>
+            <a:r>
+              <a:rPr lang="en-GB" sz="1600" dirty="0" err="1"/>
+              <a:t>progetti</a:t>
+            </a:r>
+            <a:r>
+              <a:rPr lang="en-GB" sz="1600" dirty="0"/>
+              <a:t>; ogni </a:t>
+            </a:r>
+            <a:r>
+              <a:rPr lang="en-GB" sz="1600" dirty="0" err="1"/>
+              <a:t>studente</a:t>
+            </a:r>
+            <a:r>
+              <a:rPr lang="en-GB" sz="1600" dirty="0"/>
+              <a:t> ha un tutor </a:t>
+            </a:r>
+            <a:r>
+              <a:rPr lang="en-GB" sz="1600" dirty="0" err="1"/>
+              <a:t>accademico</a:t>
+            </a:r>
+            <a:r>
+              <a:rPr lang="en-GB" sz="1600" dirty="0"/>
+              <a:t>; ogni </a:t>
+            </a:r>
+            <a:r>
+              <a:rPr lang="en-GB" sz="1600" dirty="0" err="1"/>
+              <a:t>progetto</a:t>
+            </a:r>
+            <a:r>
+              <a:rPr lang="en-GB" sz="1600" dirty="0"/>
+              <a:t> ha un tutor </a:t>
+            </a:r>
+            <a:r>
+              <a:rPr lang="en-GB" sz="1600" dirty="0" err="1"/>
+              <a:t>aziendale</a:t>
+            </a:r>
+            <a:r>
+              <a:rPr lang="en-GB" sz="1600" dirty="0"/>
+              <a:t>; </a:t>
+            </a:r>
+            <a:r>
+              <a:rPr lang="en-GB" sz="1600" dirty="0" err="1"/>
+              <a:t>quando</a:t>
+            </a:r>
+            <a:r>
+              <a:rPr lang="en-GB" sz="1600" dirty="0"/>
+              <a:t> </a:t>
+            </a:r>
+            <a:r>
+              <a:rPr lang="en-GB" sz="1600" dirty="0" err="1"/>
+              <a:t>una</a:t>
+            </a:r>
+            <a:r>
+              <a:rPr lang="en-GB" sz="1600" dirty="0"/>
+              <a:t> </a:t>
+            </a:r>
+            <a:r>
+              <a:rPr lang="en-GB" sz="1600" dirty="0" err="1"/>
+              <a:t>candidatura</a:t>
+            </a:r>
+            <a:r>
+              <a:rPr lang="en-GB" sz="1600" dirty="0"/>
+              <a:t> </a:t>
+            </a:r>
+            <a:r>
+              <a:rPr lang="en-GB" sz="1600" dirty="0" err="1"/>
+              <a:t>viene</a:t>
+            </a:r>
+            <a:r>
+              <a:rPr lang="en-GB" sz="1600" dirty="0"/>
+              <a:t> </a:t>
+            </a:r>
+            <a:r>
+              <a:rPr lang="en-GB" sz="1600" dirty="0" err="1"/>
+              <a:t>accettata</a:t>
+            </a:r>
+            <a:r>
+              <a:rPr lang="en-GB" sz="1600" dirty="0"/>
+              <a:t> </a:t>
+            </a:r>
+            <a:r>
+              <a:rPr lang="en-GB" sz="1600" dirty="0" err="1"/>
+              <a:t>si</a:t>
+            </a:r>
+            <a:r>
+              <a:rPr lang="en-GB" sz="1600" dirty="0"/>
+              <a:t> </a:t>
+            </a:r>
+            <a:r>
+              <a:rPr lang="en-GB" sz="1600" dirty="0" err="1"/>
+              <a:t>attiva</a:t>
+            </a:r>
+            <a:r>
+              <a:rPr lang="en-GB" sz="1600" dirty="0"/>
+              <a:t> un </a:t>
+            </a:r>
+            <a:r>
+              <a:rPr lang="en-GB" sz="1600" dirty="0" err="1"/>
+              <a:t>tirocinio</a:t>
+            </a:r>
+            <a:r>
+              <a:rPr lang="en-GB" sz="1600" dirty="0"/>
+              <a:t>. Durante il </a:t>
+            </a:r>
+            <a:r>
+              <a:rPr lang="en-GB" sz="1600" dirty="0" err="1"/>
+              <a:t>tirocinio</a:t>
+            </a:r>
+            <a:r>
+              <a:rPr lang="en-GB" sz="1600" dirty="0"/>
+              <a:t> </a:t>
+            </a:r>
+            <a:r>
+              <a:rPr lang="en-GB" sz="1600" dirty="0" err="1"/>
+              <a:t>vengono</a:t>
+            </a:r>
+            <a:r>
+              <a:rPr lang="en-GB" sz="1600" dirty="0"/>
+              <a:t> </a:t>
+            </a:r>
+            <a:r>
+              <a:rPr lang="en-GB" sz="1600" dirty="0" err="1"/>
+              <a:t>prodotti</a:t>
+            </a:r>
+            <a:r>
+              <a:rPr lang="en-GB" sz="1600" dirty="0"/>
+              <a:t> report </a:t>
+            </a:r>
+            <a:r>
+              <a:rPr lang="en-GB" sz="1600" dirty="0" err="1"/>
+              <a:t>settimanali</a:t>
+            </a:r>
+            <a:r>
+              <a:rPr lang="en-GB" sz="1600" dirty="0"/>
+              <a:t> </a:t>
+            </a:r>
+            <a:r>
+              <a:rPr lang="en-GB" sz="1600" dirty="0" err="1"/>
+              <a:t>numerati</a:t>
+            </a:r>
+            <a:r>
+              <a:rPr lang="en-GB" sz="1600" dirty="0"/>
+              <a:t> </a:t>
+            </a:r>
+            <a:r>
+              <a:rPr lang="en-GB" sz="1600" dirty="0" err="1"/>
+              <a:t>progressivamente</a:t>
+            </a:r>
+            <a:r>
+              <a:rPr lang="en-GB" sz="1600" dirty="0"/>
+              <a:t> </a:t>
+            </a:r>
+            <a:r>
+              <a:rPr lang="en-GB" sz="1600" dirty="0" err="1"/>
+              <a:t>all’interno</a:t>
+            </a:r>
+            <a:r>
+              <a:rPr lang="en-GB" sz="1600" dirty="0"/>
+              <a:t> del </a:t>
+            </a:r>
+            <a:r>
+              <a:rPr lang="en-GB" sz="1600" dirty="0" err="1"/>
+              <a:t>tirocinio</a:t>
+            </a:r>
+            <a:r>
+              <a:rPr lang="en-GB" sz="1600" dirty="0"/>
+              <a:t>. </a:t>
+            </a:r>
+            <a:r>
+              <a:rPr lang="en-GB" sz="1600" dirty="0" err="1"/>
+              <a:t>Identificare</a:t>
+            </a:r>
+            <a:r>
+              <a:rPr lang="en-GB" sz="1600" dirty="0"/>
+              <a:t> </a:t>
+            </a:r>
+            <a:r>
+              <a:rPr lang="en-GB" sz="1600" dirty="0" err="1"/>
+              <a:t>entità</a:t>
+            </a:r>
+            <a:r>
+              <a:rPr lang="en-GB" sz="1600" dirty="0"/>
+              <a:t>, </a:t>
+            </a:r>
+            <a:r>
+              <a:rPr lang="en-GB" sz="1600" dirty="0" err="1"/>
+              <a:t>attributi</a:t>
+            </a:r>
+            <a:r>
+              <a:rPr lang="en-GB" sz="1600" dirty="0"/>
+              <a:t>, </a:t>
+            </a:r>
+            <a:r>
+              <a:rPr lang="en-GB" sz="1600" dirty="0" err="1"/>
+              <a:t>chiavi</a:t>
+            </a:r>
+            <a:r>
+              <a:rPr lang="en-GB" sz="1600" dirty="0"/>
+              <a:t>, </a:t>
+            </a:r>
+            <a:r>
+              <a:rPr lang="en-GB" sz="1600" dirty="0" err="1"/>
+              <a:t>relazioni</a:t>
+            </a:r>
+            <a:r>
+              <a:rPr lang="en-GB" sz="1600" dirty="0"/>
+              <a:t>, </a:t>
+            </a:r>
+            <a:r>
+              <a:rPr lang="en-GB" sz="1600" dirty="0" err="1"/>
+              <a:t>cardinalità</a:t>
+            </a:r>
+            <a:r>
+              <a:rPr lang="en-GB" sz="1600" dirty="0"/>
+              <a:t> </a:t>
+            </a:r>
+            <a:r>
+              <a:rPr lang="en-GB" sz="1600" dirty="0" err="1"/>
+              <a:t>minime</a:t>
+            </a:r>
+            <a:r>
+              <a:rPr lang="en-GB" sz="1600" dirty="0"/>
+              <a:t> e </a:t>
+            </a:r>
+            <a:r>
+              <a:rPr lang="en-GB" sz="1600" dirty="0" err="1"/>
+              <a:t>massime</a:t>
+            </a:r>
+            <a:r>
+              <a:rPr lang="en-GB" sz="1600" dirty="0"/>
+              <a:t>, </a:t>
+            </a:r>
+            <a:r>
+              <a:rPr lang="en-GB" sz="1600" dirty="0" err="1"/>
+              <a:t>eventuali</a:t>
+            </a:r>
+            <a:r>
+              <a:rPr lang="en-GB" sz="1600" dirty="0"/>
+              <a:t> </a:t>
+            </a:r>
+            <a:r>
+              <a:rPr lang="en-GB" sz="1600" dirty="0" err="1"/>
+              <a:t>vincoli</a:t>
+            </a:r>
+            <a:r>
+              <a:rPr lang="en-GB" sz="1600" dirty="0"/>
+              <a:t> di </a:t>
+            </a:r>
+            <a:r>
+              <a:rPr lang="en-GB" sz="1600" dirty="0" err="1"/>
+              <a:t>dipendenza</a:t>
+            </a:r>
+            <a:r>
+              <a:rPr lang="en-GB" sz="1600" dirty="0"/>
+              <a:t> </a:t>
+            </a:r>
+            <a:r>
+              <a:rPr lang="en-GB" sz="1600" dirty="0" err="1"/>
+              <a:t>esistenziale</a:t>
+            </a:r>
+            <a:r>
+              <a:rPr lang="en-GB" sz="1600" dirty="0"/>
+              <a:t> e </a:t>
+            </a:r>
+            <a:r>
+              <a:rPr lang="en-GB" sz="1600" dirty="0" err="1"/>
+              <a:t>almeno</a:t>
+            </a:r>
+            <a:r>
+              <a:rPr lang="en-GB" sz="1600" dirty="0"/>
+              <a:t> </a:t>
+            </a:r>
+            <a:r>
+              <a:rPr lang="en-GB" sz="1600" dirty="0" err="1"/>
+              <a:t>una</a:t>
+            </a:r>
+            <a:r>
+              <a:rPr lang="en-GB" sz="1600" dirty="0"/>
+              <a:t> weak entity.</a:t>
+            </a:r>
+          </a:p>
+          <a:p>
+            <a:r>
+              <a:rPr lang="en-GB" sz="1800" dirty="0">
+                <a:solidFill>
+                  <a:schemeClr val="tx1"/>
+                </a:solidFill>
+              </a:rPr>
+              <a:t>Nota</a:t>
+            </a:r>
+          </a:p>
+          <a:p>
+            <a:pPr lvl="1"/>
+            <a:r>
+              <a:rPr lang="en-GB" sz="1800" dirty="0" err="1">
+                <a:solidFill>
+                  <a:schemeClr val="tx1"/>
+                </a:solidFill>
+              </a:rPr>
+              <a:t>evidenziare</a:t>
+            </a:r>
+            <a:r>
+              <a:rPr lang="en-GB" sz="1800" dirty="0">
+                <a:solidFill>
+                  <a:schemeClr val="tx1"/>
+                </a:solidFill>
+              </a:rPr>
+              <a:t> la weak entity;</a:t>
+            </a:r>
+          </a:p>
+          <a:p>
+            <a:pPr lvl="1"/>
+            <a:r>
+              <a:rPr lang="en-GB" sz="1800" dirty="0" err="1">
+                <a:solidFill>
+                  <a:schemeClr val="tx1"/>
+                </a:solidFill>
+              </a:rPr>
+              <a:t>distinguere</a:t>
+            </a:r>
+            <a:r>
+              <a:rPr lang="en-GB" sz="1800" dirty="0">
+                <a:solidFill>
+                  <a:schemeClr val="tx1"/>
+                </a:solidFill>
+              </a:rPr>
+              <a:t> </a:t>
+            </a:r>
+            <a:r>
+              <a:rPr lang="en-GB" sz="1800" dirty="0" err="1">
+                <a:solidFill>
+                  <a:schemeClr val="tx1"/>
+                </a:solidFill>
+              </a:rPr>
+              <a:t>tra</a:t>
+            </a:r>
+            <a:r>
+              <a:rPr lang="en-GB" sz="1800" dirty="0">
+                <a:solidFill>
+                  <a:schemeClr val="tx1"/>
+                </a:solidFill>
+              </a:rPr>
+              <a:t> </a:t>
+            </a:r>
+            <a:r>
+              <a:rPr lang="en-GB" sz="1800" dirty="0" err="1">
+                <a:solidFill>
+                  <a:schemeClr val="tx1"/>
+                </a:solidFill>
+              </a:rPr>
+              <a:t>partecipazione</a:t>
+            </a:r>
+            <a:r>
+              <a:rPr lang="en-GB" sz="1800" dirty="0">
+                <a:solidFill>
+                  <a:schemeClr val="tx1"/>
+                </a:solidFill>
+              </a:rPr>
+              <a:t> </a:t>
+            </a:r>
+            <a:r>
+              <a:rPr lang="en-GB" sz="1800" dirty="0" err="1">
+                <a:solidFill>
+                  <a:schemeClr val="tx1"/>
+                </a:solidFill>
+              </a:rPr>
+              <a:t>totale</a:t>
+            </a:r>
+            <a:r>
+              <a:rPr lang="en-GB" sz="1800" dirty="0">
+                <a:solidFill>
+                  <a:schemeClr val="tx1"/>
+                </a:solidFill>
+              </a:rPr>
+              <a:t> e </a:t>
+            </a:r>
+            <a:r>
+              <a:rPr lang="en-GB" sz="1800" dirty="0" err="1">
+                <a:solidFill>
+                  <a:schemeClr val="tx1"/>
+                </a:solidFill>
+              </a:rPr>
+              <a:t>parziale</a:t>
+            </a:r>
+            <a:r>
+              <a:rPr lang="en-GB" sz="1800" dirty="0">
+                <a:solidFill>
+                  <a:schemeClr val="tx1"/>
+                </a:solidFill>
+              </a:rPr>
+              <a:t>;</a:t>
+            </a:r>
+          </a:p>
+          <a:p>
+            <a:pPr lvl="1"/>
+            <a:r>
+              <a:rPr lang="en-GB" sz="1800" dirty="0" err="1">
+                <a:solidFill>
+                  <a:schemeClr val="tx1"/>
+                </a:solidFill>
+              </a:rPr>
+              <a:t>motivare</a:t>
+            </a:r>
+            <a:r>
+              <a:rPr lang="en-GB" sz="1800" dirty="0">
+                <a:solidFill>
+                  <a:schemeClr val="tx1"/>
+                </a:solidFill>
+              </a:rPr>
+              <a:t> </a:t>
+            </a:r>
+            <a:r>
+              <a:rPr lang="en-GB" sz="1800" dirty="0" err="1">
+                <a:solidFill>
+                  <a:schemeClr val="tx1"/>
+                </a:solidFill>
+              </a:rPr>
+              <a:t>almeno</a:t>
+            </a:r>
+            <a:r>
+              <a:rPr lang="en-GB" sz="1800" dirty="0">
+                <a:solidFill>
+                  <a:schemeClr val="tx1"/>
+                </a:solidFill>
+              </a:rPr>
+              <a:t> due existence dependency constraints;</a:t>
+            </a:r>
+          </a:p>
+          <a:p>
+            <a:pPr marL="0" indent="0">
+              <a:buNone/>
+            </a:pPr>
+            <a:endParaRPr lang="en-GB" sz="1400" dirty="0"/>
           </a:p>
         </p:txBody>
       </p:sp>
     </p:spTree>
+    <p:extLst>
+      <p:ext uri="{BB962C8B-B14F-4D97-AF65-F5344CB8AC3E}">
+        <p14:creationId xmlns:p14="http://schemas.microsoft.com/office/powerpoint/2010/main" val="1253662716"/>
+      </p:ext>
+    </p:extLst>
   </p:cSld>
   <p:clrMapOvr>
     <a:masterClrMapping/>
@@ -24168,10 +24948,10 @@
       </p:grpSpPr>
       <p:sp>
         <p:nvSpPr>
-          <p:cNvPr id="93186" name="Rectangle 2">
+          <p:cNvPr id="91138" name="Rectangle 2">
             <a:extLst>
               <a:ext uri="{FF2B5EF4-FFF2-40B4-BE49-F238E27FC236}">
-                <a16:creationId xmlns:a16="http://schemas.microsoft.com/office/drawing/2014/main" id="{56AEAE91-DA46-3819-9720-8A49C7FB1C3A}"/>
+                <a16:creationId xmlns:a16="http://schemas.microsoft.com/office/drawing/2014/main" id="{6B373D79-F67B-F01B-01DD-F2F9EA3E8F1F}"/>
               </a:ext>
             </a:extLst>
           </p:cNvPr>
@@ -24189,6 +24969,117 @@
           <a:p>
             <a:pPr eaLnBrk="1" hangingPunct="1"/>
             <a:r>
+              <a:rPr lang="en-US" altLang="en-IT">
+                <a:ea typeface="ＭＳ Ｐゴシック" panose="020B0600070205080204" pitchFamily="34" charset="-128"/>
+              </a:rPr>
+              <a:t>Alternative diagrammatic notation</a:t>
+            </a:r>
+          </a:p>
+        </p:txBody>
+      </p:sp>
+      <p:sp>
+        <p:nvSpPr>
+          <p:cNvPr id="91139" name="Rectangle 3">
+            <a:extLst>
+              <a:ext uri="{FF2B5EF4-FFF2-40B4-BE49-F238E27FC236}">
+                <a16:creationId xmlns:a16="http://schemas.microsoft.com/office/drawing/2014/main" id="{CBAFB15E-61DE-795D-D6F1-A5160A07A755}"/>
+              </a:ext>
+            </a:extLst>
+          </p:cNvPr>
+          <p:cNvSpPr>
+            <a:spLocks noGrp="1" noChangeArrowheads="1"/>
+          </p:cNvSpPr>
+          <p:nvPr>
+            <p:ph idx="1"/>
+          </p:nvPr>
+        </p:nvSpPr>
+        <p:spPr>
+          <a:xfrm>
+            <a:off x="239713" y="1600200"/>
+            <a:ext cx="8294687" cy="3581400"/>
+          </a:xfrm>
+        </p:spPr>
+        <p:txBody>
+          <a:bodyPr/>
+          <a:lstStyle/>
+          <a:p>
+            <a:pPr eaLnBrk="1" hangingPunct="1"/>
+            <a:r>
+              <a:rPr lang="en-US" altLang="en-IT">
+                <a:ea typeface="ＭＳ Ｐゴシック" panose="020B0600070205080204" pitchFamily="34" charset="-128"/>
+              </a:rPr>
+              <a:t>ER diagrams is one popular example for displaying database schemas</a:t>
+            </a:r>
+          </a:p>
+          <a:p>
+            <a:pPr eaLnBrk="1" hangingPunct="1"/>
+            <a:r>
+              <a:rPr lang="en-US" altLang="en-IT">
+                <a:ea typeface="ＭＳ Ｐゴシック" panose="020B0600070205080204" pitchFamily="34" charset="-128"/>
+              </a:rPr>
+              <a:t>Many other notations exist in the literature and in various database design and modeling tools</a:t>
+            </a:r>
+          </a:p>
+          <a:p>
+            <a:pPr eaLnBrk="1" hangingPunct="1"/>
+            <a:r>
+              <a:rPr lang="en-US" altLang="en-IT">
+                <a:ea typeface="ＭＳ Ｐゴシック" panose="020B0600070205080204" pitchFamily="34" charset="-128"/>
+              </a:rPr>
+              <a:t>UML class diagrams is representative of another way of displaying ER concepts that is used in several commercial design tools</a:t>
+            </a:r>
+          </a:p>
+        </p:txBody>
+      </p:sp>
+    </p:spTree>
+  </p:cSld>
+  <p:clrMapOvr>
+    <a:masterClrMapping/>
+  </p:clrMapOvr>
+  <p:transition spd="med"/>
+</p:sld>
+</file>
+
+<file path=ppt/slides/slide49.xml><?xml version="1.0" encoding="utf-8"?>
+<p:sld xmlns:a="http://schemas.openxmlformats.org/drawingml/2006/main" xmlns:r="http://schemas.openxmlformats.org/officeDocument/2006/relationships" xmlns:p="http://schemas.openxmlformats.org/presentationml/2006/main">
+  <p:cSld>
+    <p:spTree>
+      <p:nvGrpSpPr>
+        <p:cNvPr id="1" name=""/>
+        <p:cNvGrpSpPr/>
+        <p:nvPr/>
+      </p:nvGrpSpPr>
+      <p:grpSpPr>
+        <a:xfrm>
+          <a:off x="0" y="0"/>
+          <a:ext cx="0" cy="0"/>
+          <a:chOff x="0" y="0"/>
+          <a:chExt cx="0" cy="0"/>
+        </a:xfrm>
+      </p:grpSpPr>
+      <p:sp>
+        <p:nvSpPr>
+          <p:cNvPr id="93186" name="Rectangle 2">
+            <a:extLst>
+              <a:ext uri="{FF2B5EF4-FFF2-40B4-BE49-F238E27FC236}">
+                <a16:creationId xmlns:a16="http://schemas.microsoft.com/office/drawing/2014/main" id="{56AEAE91-DA46-3819-9720-8A49C7FB1C3A}"/>
+              </a:ext>
+            </a:extLst>
+          </p:cNvPr>
+          <p:cNvSpPr>
+            <a:spLocks noGrp="1" noChangeArrowheads="1"/>
+          </p:cNvSpPr>
+          <p:nvPr>
+            <p:ph type="title"/>
+          </p:nvPr>
+        </p:nvSpPr>
+        <p:spPr/>
+        <p:txBody>
+          <a:bodyPr/>
+          <a:lstStyle/>
+          <a:p>
+            <a:pPr eaLnBrk="1" hangingPunct="1"/>
+            <a:r>
               <a:rPr lang="en-US" altLang="en-IT" sz="3200">
                 <a:ea typeface="ＭＳ Ｐゴシック" panose="020B0600070205080204" pitchFamily="34" charset="-128"/>
               </a:rPr>
@@ -24352,7 +25243,204 @@
 </p:sld>
 </file>
 
-<file path=ppt/slides/slide49.xml><?xml version="1.0" encoding="utf-8"?>
+<file path=ppt/slides/slide5.xml><?xml version="1.0" encoding="utf-8"?>
+<p:sld xmlns:a="http://schemas.openxmlformats.org/drawingml/2006/main" xmlns:r="http://schemas.openxmlformats.org/officeDocument/2006/relationships" xmlns:p="http://schemas.openxmlformats.org/presentationml/2006/main">
+  <p:cSld>
+    <p:spTree>
+      <p:nvGrpSpPr>
+        <p:cNvPr id="1" name="">
+          <a:extLst>
+            <a:ext uri="{FF2B5EF4-FFF2-40B4-BE49-F238E27FC236}">
+              <a16:creationId xmlns:a16="http://schemas.microsoft.com/office/drawing/2014/main" id="{0A413E7A-0143-6DCD-74EF-33C024CA9C71}"/>
+            </a:ext>
+          </a:extLst>
+        </p:cNvPr>
+        <p:cNvGrpSpPr/>
+        <p:nvPr/>
+      </p:nvGrpSpPr>
+      <p:grpSpPr>
+        <a:xfrm>
+          <a:off x="0" y="0"/>
+          <a:ext cx="0" cy="0"/>
+          <a:chOff x="0" y="0"/>
+          <a:chExt cx="0" cy="0"/>
+        </a:xfrm>
+      </p:grpSpPr>
+      <p:sp>
+        <p:nvSpPr>
+          <p:cNvPr id="22530" name="Rectangle 4">
+            <a:extLst>
+              <a:ext uri="{FF2B5EF4-FFF2-40B4-BE49-F238E27FC236}">
+                <a16:creationId xmlns:a16="http://schemas.microsoft.com/office/drawing/2014/main" id="{D0DB989F-96B2-E969-E52B-E7864DB6886F}"/>
+              </a:ext>
+            </a:extLst>
+          </p:cNvPr>
+          <p:cNvSpPr>
+            <a:spLocks noGrp="1" noChangeArrowheads="1"/>
+          </p:cNvSpPr>
+          <p:nvPr>
+            <p:ph type="title"/>
+          </p:nvPr>
+        </p:nvSpPr>
+        <p:spPr/>
+        <p:txBody>
+          <a:bodyPr/>
+          <a:lstStyle/>
+          <a:p>
+            <a:pPr eaLnBrk="1" hangingPunct="1"/>
+            <a:r>
+              <a:rPr lang="en-US" altLang="en-IT">
+                <a:ea typeface="ＭＳ Ｐゴシック" panose="020B0600070205080204" pitchFamily="34" charset="-128"/>
+              </a:rPr>
+              <a:t>Example COMPANY Database</a:t>
+            </a:r>
+          </a:p>
+        </p:txBody>
+      </p:sp>
+      <p:sp>
+        <p:nvSpPr>
+          <p:cNvPr id="22531" name="Rectangle 5">
+            <a:extLst>
+              <a:ext uri="{FF2B5EF4-FFF2-40B4-BE49-F238E27FC236}">
+                <a16:creationId xmlns:a16="http://schemas.microsoft.com/office/drawing/2014/main" id="{6169D0D4-AC1A-6FCA-1EA7-81EE25AAC08E}"/>
+              </a:ext>
+            </a:extLst>
+          </p:cNvPr>
+          <p:cNvSpPr>
+            <a:spLocks noGrp="1" noChangeArrowheads="1"/>
+          </p:cNvSpPr>
+          <p:nvPr>
+            <p:ph idx="1"/>
+          </p:nvPr>
+        </p:nvSpPr>
+        <p:spPr>
+          <a:xfrm>
+            <a:off x="261938" y="1752600"/>
+            <a:ext cx="8294687" cy="4038600"/>
+          </a:xfrm>
+        </p:spPr>
+        <p:txBody>
+          <a:bodyPr/>
+          <a:lstStyle/>
+          <a:p>
+            <a:pPr eaLnBrk="1" hangingPunct="1">
+              <a:lnSpc>
+                <a:spcPct val="150000"/>
+              </a:lnSpc>
+            </a:pPr>
+            <a:r>
+              <a:rPr lang="en-US" altLang="en-IT" dirty="0">
+                <a:solidFill>
+                  <a:schemeClr val="tx1"/>
+                </a:solidFill>
+                <a:ea typeface="ＭＳ Ｐゴシック" panose="020B0600070205080204" pitchFamily="34" charset="-128"/>
+              </a:rPr>
+              <a:t>We need to create a database schema design based on the following (simplified) </a:t>
+            </a:r>
+            <a:r>
+              <a:rPr lang="en-US" altLang="en-IT" b="1" dirty="0">
+                <a:solidFill>
+                  <a:schemeClr val="tx1"/>
+                </a:solidFill>
+                <a:ea typeface="ＭＳ Ｐゴシック" panose="020B0600070205080204" pitchFamily="34" charset="-128"/>
+              </a:rPr>
+              <a:t>requirements</a:t>
+            </a:r>
+            <a:r>
+              <a:rPr lang="en-US" altLang="en-IT" dirty="0">
+                <a:solidFill>
+                  <a:schemeClr val="tx1"/>
+                </a:solidFill>
+                <a:ea typeface="ＭＳ Ｐゴシック" panose="020B0600070205080204" pitchFamily="34" charset="-128"/>
+              </a:rPr>
+              <a:t> of the COMPANY Database:</a:t>
+            </a:r>
+          </a:p>
+          <a:p>
+            <a:pPr lvl="1" eaLnBrk="1" hangingPunct="1">
+              <a:lnSpc>
+                <a:spcPct val="150000"/>
+              </a:lnSpc>
+            </a:pPr>
+            <a:r>
+              <a:rPr lang="en-US" altLang="en-IT" dirty="0">
+                <a:solidFill>
+                  <a:schemeClr val="tx1"/>
+                </a:solidFill>
+                <a:ea typeface="ＭＳ Ｐゴシック" panose="020B0600070205080204" pitchFamily="34" charset="-128"/>
+              </a:rPr>
+              <a:t>The company is organized into DEPARTMENTs. Each department has a name, number and an employee who </a:t>
+            </a:r>
+            <a:r>
+              <a:rPr lang="en-US" altLang="en-IT" i="1" dirty="0">
+                <a:solidFill>
+                  <a:schemeClr val="tx1"/>
+                </a:solidFill>
+                <a:ea typeface="ＭＳ Ｐゴシック" panose="020B0600070205080204" pitchFamily="34" charset="-128"/>
+              </a:rPr>
+              <a:t>manages</a:t>
+            </a:r>
+            <a:r>
+              <a:rPr lang="en-US" altLang="en-IT" dirty="0">
+                <a:solidFill>
+                  <a:schemeClr val="tx1"/>
+                </a:solidFill>
+                <a:ea typeface="ＭＳ Ｐゴシック" panose="020B0600070205080204" pitchFamily="34" charset="-128"/>
+              </a:rPr>
+              <a:t> the department. We keep track of the start date of the department manager. A department may have several locations.</a:t>
+            </a:r>
+          </a:p>
+          <a:p>
+            <a:pPr lvl="1" eaLnBrk="1" hangingPunct="1">
+              <a:lnSpc>
+                <a:spcPct val="150000"/>
+              </a:lnSpc>
+            </a:pPr>
+            <a:r>
+              <a:rPr lang="en-US" altLang="en-IT" dirty="0">
+                <a:solidFill>
+                  <a:schemeClr val="tx1"/>
+                </a:solidFill>
+                <a:ea typeface="ＭＳ Ｐゴシック" panose="020B0600070205080204" pitchFamily="34" charset="-128"/>
+              </a:rPr>
+              <a:t>Each department </a:t>
+            </a:r>
+            <a:r>
+              <a:rPr lang="en-US" altLang="en-IT" i="1" dirty="0">
+                <a:solidFill>
+                  <a:schemeClr val="tx1"/>
+                </a:solidFill>
+                <a:ea typeface="ＭＳ Ｐゴシック" panose="020B0600070205080204" pitchFamily="34" charset="-128"/>
+              </a:rPr>
+              <a:t>controls</a:t>
+            </a:r>
+            <a:r>
+              <a:rPr lang="en-US" altLang="en-IT" dirty="0">
+                <a:solidFill>
+                  <a:schemeClr val="tx1"/>
+                </a:solidFill>
+                <a:ea typeface="ＭＳ Ｐゴシック" panose="020B0600070205080204" pitchFamily="34" charset="-128"/>
+              </a:rPr>
+              <a:t> a number of PROJECTs. Each project has a unique name, unique number and is located at a single location.</a:t>
+            </a:r>
+          </a:p>
+        </p:txBody>
+      </p:sp>
+    </p:spTree>
+    <p:extLst>
+      <p:ext uri="{BB962C8B-B14F-4D97-AF65-F5344CB8AC3E}">
+        <p14:creationId xmlns:p14="http://schemas.microsoft.com/office/powerpoint/2010/main" val="4077261648"/>
+      </p:ext>
+    </p:extLst>
+  </p:cSld>
+  <p:clrMapOvr>
+    <a:masterClrMapping/>
+  </p:clrMapOvr>
+  <p:transition spd="med"/>
+</p:sld>
+</file>
+
+<file path=ppt/slides/slide50.xml><?xml version="1.0" encoding="utf-8"?>
 <p:sld xmlns:a="http://schemas.openxmlformats.org/drawingml/2006/main" xmlns:r="http://schemas.openxmlformats.org/officeDocument/2006/relationships" xmlns:p="http://schemas.openxmlformats.org/presentationml/2006/main">
   <p:cSld>
     <p:spTree>
@@ -24694,204 +25782,7 @@
 </p:sld>
 </file>
 
-<file path=ppt/slides/slide5.xml><?xml version="1.0" encoding="utf-8"?>
-<p:sld xmlns:a="http://schemas.openxmlformats.org/drawingml/2006/main" xmlns:r="http://schemas.openxmlformats.org/officeDocument/2006/relationships" xmlns:p="http://schemas.openxmlformats.org/presentationml/2006/main">
-  <p:cSld>
-    <p:spTree>
-      <p:nvGrpSpPr>
-        <p:cNvPr id="1" name="">
-          <a:extLst>
-            <a:ext uri="{FF2B5EF4-FFF2-40B4-BE49-F238E27FC236}">
-              <a16:creationId xmlns:a16="http://schemas.microsoft.com/office/drawing/2014/main" id="{0A413E7A-0143-6DCD-74EF-33C024CA9C71}"/>
-            </a:ext>
-          </a:extLst>
-        </p:cNvPr>
-        <p:cNvGrpSpPr/>
-        <p:nvPr/>
-      </p:nvGrpSpPr>
-      <p:grpSpPr>
-        <a:xfrm>
-          <a:off x="0" y="0"/>
-          <a:ext cx="0" cy="0"/>
-          <a:chOff x="0" y="0"/>
-          <a:chExt cx="0" cy="0"/>
-        </a:xfrm>
-      </p:grpSpPr>
-      <p:sp>
-        <p:nvSpPr>
-          <p:cNvPr id="22530" name="Rectangle 4">
-            <a:extLst>
-              <a:ext uri="{FF2B5EF4-FFF2-40B4-BE49-F238E27FC236}">
-                <a16:creationId xmlns:a16="http://schemas.microsoft.com/office/drawing/2014/main" id="{D0DB989F-96B2-E969-E52B-E7864DB6886F}"/>
-              </a:ext>
-            </a:extLst>
-          </p:cNvPr>
-          <p:cNvSpPr>
-            <a:spLocks noGrp="1" noChangeArrowheads="1"/>
-          </p:cNvSpPr>
-          <p:nvPr>
-            <p:ph type="title"/>
-          </p:nvPr>
-        </p:nvSpPr>
-        <p:spPr/>
-        <p:txBody>
-          <a:bodyPr/>
-          <a:lstStyle/>
-          <a:p>
-            <a:pPr eaLnBrk="1" hangingPunct="1"/>
-            <a:r>
-              <a:rPr lang="en-US" altLang="en-IT">
-                <a:ea typeface="ＭＳ Ｐゴシック" panose="020B0600070205080204" pitchFamily="34" charset="-128"/>
-              </a:rPr>
-              <a:t>Example COMPANY Database</a:t>
-            </a:r>
-          </a:p>
-        </p:txBody>
-      </p:sp>
-      <p:sp>
-        <p:nvSpPr>
-          <p:cNvPr id="22531" name="Rectangle 5">
-            <a:extLst>
-              <a:ext uri="{FF2B5EF4-FFF2-40B4-BE49-F238E27FC236}">
-                <a16:creationId xmlns:a16="http://schemas.microsoft.com/office/drawing/2014/main" id="{6169D0D4-AC1A-6FCA-1EA7-81EE25AAC08E}"/>
-              </a:ext>
-            </a:extLst>
-          </p:cNvPr>
-          <p:cNvSpPr>
-            <a:spLocks noGrp="1" noChangeArrowheads="1"/>
-          </p:cNvSpPr>
-          <p:nvPr>
-            <p:ph idx="1"/>
-          </p:nvPr>
-        </p:nvSpPr>
-        <p:spPr>
-          <a:xfrm>
-            <a:off x="261938" y="1752600"/>
-            <a:ext cx="8294687" cy="4038600"/>
-          </a:xfrm>
-        </p:spPr>
-        <p:txBody>
-          <a:bodyPr/>
-          <a:lstStyle/>
-          <a:p>
-            <a:pPr eaLnBrk="1" hangingPunct="1">
-              <a:lnSpc>
-                <a:spcPct val="150000"/>
-              </a:lnSpc>
-            </a:pPr>
-            <a:r>
-              <a:rPr lang="en-US" altLang="en-IT" dirty="0">
-                <a:solidFill>
-                  <a:schemeClr val="tx1"/>
-                </a:solidFill>
-                <a:ea typeface="ＭＳ Ｐゴシック" panose="020B0600070205080204" pitchFamily="34" charset="-128"/>
-              </a:rPr>
-              <a:t>We need to create a database schema design based on the following (simplified) </a:t>
-            </a:r>
-            <a:r>
-              <a:rPr lang="en-US" altLang="en-IT" b="1" dirty="0">
-                <a:solidFill>
-                  <a:schemeClr val="tx1"/>
-                </a:solidFill>
-                <a:ea typeface="ＭＳ Ｐゴシック" panose="020B0600070205080204" pitchFamily="34" charset="-128"/>
-              </a:rPr>
-              <a:t>requirements</a:t>
-            </a:r>
-            <a:r>
-              <a:rPr lang="en-US" altLang="en-IT" dirty="0">
-                <a:solidFill>
-                  <a:schemeClr val="tx1"/>
-                </a:solidFill>
-                <a:ea typeface="ＭＳ Ｐゴシック" panose="020B0600070205080204" pitchFamily="34" charset="-128"/>
-              </a:rPr>
-              <a:t> of the COMPANY Database:</a:t>
-            </a:r>
-          </a:p>
-          <a:p>
-            <a:pPr lvl="1" eaLnBrk="1" hangingPunct="1">
-              <a:lnSpc>
-                <a:spcPct val="150000"/>
-              </a:lnSpc>
-            </a:pPr>
-            <a:r>
-              <a:rPr lang="en-US" altLang="en-IT" dirty="0">
-                <a:solidFill>
-                  <a:schemeClr val="tx1"/>
-                </a:solidFill>
-                <a:ea typeface="ＭＳ Ｐゴシック" panose="020B0600070205080204" pitchFamily="34" charset="-128"/>
-              </a:rPr>
-              <a:t>The company is organized into DEPARTMENTs. Each department has a name, number and an employee who </a:t>
-            </a:r>
-            <a:r>
-              <a:rPr lang="en-US" altLang="en-IT" i="1" dirty="0">
-                <a:solidFill>
-                  <a:schemeClr val="tx1"/>
-                </a:solidFill>
-                <a:ea typeface="ＭＳ Ｐゴシック" panose="020B0600070205080204" pitchFamily="34" charset="-128"/>
-              </a:rPr>
-              <a:t>manages</a:t>
-            </a:r>
-            <a:r>
-              <a:rPr lang="en-US" altLang="en-IT" dirty="0">
-                <a:solidFill>
-                  <a:schemeClr val="tx1"/>
-                </a:solidFill>
-                <a:ea typeface="ＭＳ Ｐゴシック" panose="020B0600070205080204" pitchFamily="34" charset="-128"/>
-              </a:rPr>
-              <a:t> the department. We keep track of the start date of the department manager. A department may have several locations.</a:t>
-            </a:r>
-          </a:p>
-          <a:p>
-            <a:pPr lvl="1" eaLnBrk="1" hangingPunct="1">
-              <a:lnSpc>
-                <a:spcPct val="150000"/>
-              </a:lnSpc>
-            </a:pPr>
-            <a:r>
-              <a:rPr lang="en-US" altLang="en-IT" dirty="0">
-                <a:solidFill>
-                  <a:schemeClr val="tx1"/>
-                </a:solidFill>
-                <a:ea typeface="ＭＳ Ｐゴシック" panose="020B0600070205080204" pitchFamily="34" charset="-128"/>
-              </a:rPr>
-              <a:t>Each department </a:t>
-            </a:r>
-            <a:r>
-              <a:rPr lang="en-US" altLang="en-IT" i="1" dirty="0">
-                <a:solidFill>
-                  <a:schemeClr val="tx1"/>
-                </a:solidFill>
-                <a:ea typeface="ＭＳ Ｐゴシック" panose="020B0600070205080204" pitchFamily="34" charset="-128"/>
-              </a:rPr>
-              <a:t>controls</a:t>
-            </a:r>
-            <a:r>
-              <a:rPr lang="en-US" altLang="en-IT" dirty="0">
-                <a:solidFill>
-                  <a:schemeClr val="tx1"/>
-                </a:solidFill>
-                <a:ea typeface="ＭＳ Ｐゴシック" panose="020B0600070205080204" pitchFamily="34" charset="-128"/>
-              </a:rPr>
-              <a:t> a number of PROJECTs. Each project has a unique name, unique number and is located at a single location.</a:t>
-            </a:r>
-          </a:p>
-        </p:txBody>
-      </p:sp>
-    </p:spTree>
-    <p:extLst>
-      <p:ext uri="{BB962C8B-B14F-4D97-AF65-F5344CB8AC3E}">
-        <p14:creationId xmlns:p14="http://schemas.microsoft.com/office/powerpoint/2010/main" val="4077261648"/>
-      </p:ext>
-    </p:extLst>
-  </p:cSld>
-  <p:clrMapOvr>
-    <a:masterClrMapping/>
-  </p:clrMapOvr>
-  <p:transition spd="med"/>
-</p:sld>
-</file>
-
-<file path=ppt/slides/slide50.xml><?xml version="1.0" encoding="utf-8"?>
+<file path=ppt/slides/slide51.xml><?xml version="1.0" encoding="utf-8"?>
 <p:sld xmlns:a="http://schemas.openxmlformats.org/drawingml/2006/main" xmlns:r="http://schemas.openxmlformats.org/officeDocument/2006/relationships" xmlns:p="http://schemas.openxmlformats.org/presentationml/2006/main">
   <p:cSld>
     <p:spTree>
@@ -25698,7 +26589,7 @@
 </p:sld>
 </file>
 
-<file path=ppt/slides/slide51.xml><?xml version="1.0" encoding="utf-8"?>
+<file path=ppt/slides/slide52.xml><?xml version="1.0" encoding="utf-8"?>
 <p:sld xmlns:a="http://schemas.openxmlformats.org/drawingml/2006/main" xmlns:r="http://schemas.openxmlformats.org/officeDocument/2006/relationships" xmlns:p="http://schemas.openxmlformats.org/presentationml/2006/main">
   <p:cSld>
     <p:spTree>
@@ -25786,123 +26677,6 @@
           </a:p>
         </p:txBody>
       </p:sp>
-    </p:spTree>
-  </p:cSld>
-  <p:clrMapOvr>
-    <a:masterClrMapping/>
-  </p:clrMapOvr>
-  <p:transition spd="med"/>
-</p:sld>
-</file>
-
-<file path=ppt/slides/slide52.xml><?xml version="1.0" encoding="utf-8"?>
-<p:sld xmlns:a="http://schemas.openxmlformats.org/drawingml/2006/main" xmlns:r="http://schemas.openxmlformats.org/officeDocument/2006/relationships" xmlns:p="http://schemas.openxmlformats.org/presentationml/2006/main">
-  <p:cSld>
-    <p:spTree>
-      <p:nvGrpSpPr>
-        <p:cNvPr id="1" name=""/>
-        <p:cNvGrpSpPr/>
-        <p:nvPr/>
-      </p:nvGrpSpPr>
-      <p:grpSpPr>
-        <a:xfrm>
-          <a:off x="0" y="0"/>
-          <a:ext cx="0" cy="0"/>
-          <a:chOff x="0" y="0"/>
-          <a:chExt cx="0" cy="0"/>
-        </a:xfrm>
-      </p:grpSpPr>
-      <p:sp>
-        <p:nvSpPr>
-          <p:cNvPr id="101378" name="Rectangle 1026">
-            <a:extLst>
-              <a:ext uri="{FF2B5EF4-FFF2-40B4-BE49-F238E27FC236}">
-                <a16:creationId xmlns:a16="http://schemas.microsoft.com/office/drawing/2014/main" id="{5F8FD1CC-7001-E262-DEE6-8B1C585FD7EB}"/>
-              </a:ext>
-            </a:extLst>
-          </p:cNvPr>
-          <p:cNvSpPr>
-            <a:spLocks noGrp="1" noChangeArrowheads="1"/>
-          </p:cNvSpPr>
-          <p:nvPr>
-            <p:ph type="title"/>
-          </p:nvPr>
-        </p:nvSpPr>
-        <p:spPr/>
-        <p:txBody>
-          <a:bodyPr/>
-          <a:lstStyle/>
-          <a:p>
-            <a:pPr eaLnBrk="1" hangingPunct="1"/>
-            <a:r>
-              <a:rPr lang="en-US" altLang="en-IT" sz="3200">
-                <a:ea typeface="ＭＳ Ｐゴシック" panose="020B0600070205080204" pitchFamily="34" charset="-128"/>
-              </a:rPr>
-              <a:t>Another example of a ternary relationship</a:t>
-            </a:r>
-          </a:p>
-        </p:txBody>
-      </p:sp>
-      <p:pic>
-        <p:nvPicPr>
-          <p:cNvPr id="101379" name="Picture 1029" descr="fig03_18">
-            <a:extLst>
-              <a:ext uri="{FF2B5EF4-FFF2-40B4-BE49-F238E27FC236}">
-                <a16:creationId xmlns:a16="http://schemas.microsoft.com/office/drawing/2014/main" id="{9F8E2D8C-EDBF-5085-F3FA-43822441384F}"/>
-              </a:ext>
-            </a:extLst>
-          </p:cNvPr>
-          <p:cNvPicPr>
-            <a:picLocks noChangeAspect="1" noChangeArrowheads="1"/>
-          </p:cNvPicPr>
-          <p:nvPr/>
-        </p:nvPicPr>
-        <p:blipFill>
-          <a:blip r:embed="rId2">
-            <a:extLst>
-              <a:ext uri="{28A0092B-C50C-407E-A947-70E740481C1C}">
-                <a14:useLocalDpi xmlns:a14="http://schemas.microsoft.com/office/drawing/2010/main" val="0"/>
-              </a:ext>
-            </a:extLst>
-          </a:blip>
-          <a:srcRect/>
-          <a:stretch>
-            <a:fillRect/>
-          </a:stretch>
-        </p:blipFill>
-        <p:spPr bwMode="auto">
-          <a:xfrm>
-            <a:off x="315913" y="1905000"/>
-            <a:ext cx="7989887" cy="3733800"/>
-          </a:xfrm>
-          <a:prstGeom prst="rect">
-            <a:avLst/>
-          </a:prstGeom>
-          <a:noFill/>
-          <a:ln>
-            <a:noFill/>
-          </a:ln>
-          <a:extLst>
-            <a:ext uri="{909E8E84-426E-40DD-AFC4-6F175D3DCCD1}">
-              <a14:hiddenFill xmlns:a14="http://schemas.microsoft.com/office/drawing/2010/main">
-                <a:solidFill>
-                  <a:srgbClr val="FFFFFF"/>
-                </a:solidFill>
-              </a14:hiddenFill>
-            </a:ext>
-            <a:ext uri="{91240B29-F687-4F45-9708-019B960494DF}">
-              <a14:hiddenLine xmlns:a14="http://schemas.microsoft.com/office/drawing/2010/main" w="9525">
-                <a:solidFill>
-                  <a:srgbClr val="000000"/>
-                </a:solidFill>
-                <a:miter lim="800000"/>
-                <a:headEnd/>
-                <a:tailEnd/>
-              </a14:hiddenLine>
-            </a:ext>
-          </a:extLst>
-        </p:spPr>
-      </p:pic>
     </p:spTree>
   </p:cSld>
   <p:clrMapOvr>
@@ -25931,10 +26705,10 @@
       </p:grpSpPr>
       <p:sp>
         <p:nvSpPr>
-          <p:cNvPr id="102402" name="Rectangle 1026">
+          <p:cNvPr id="101378" name="Rectangle 1026">
             <a:extLst>
               <a:ext uri="{FF2B5EF4-FFF2-40B4-BE49-F238E27FC236}">
-                <a16:creationId xmlns:a16="http://schemas.microsoft.com/office/drawing/2014/main" id="{07C5F1C5-8B10-64EA-39E3-FB44C4A65ED3}"/>
+                <a16:creationId xmlns:a16="http://schemas.microsoft.com/office/drawing/2014/main" id="{5F8FD1CC-7001-E262-DEE6-8B1C585FD7EB}"/>
               </a:ext>
             </a:extLst>
           </p:cNvPr>
@@ -25955,105 +26729,71 @@
               <a:rPr lang="en-US" altLang="en-IT" sz="3200">
                 <a:ea typeface="ＭＳ Ｐゴシック" panose="020B0600070205080204" pitchFamily="34" charset="-128"/>
               </a:rPr>
-              <a:t>Displaying constraints on higher-degree relationships</a:t>
+              <a:t>Another example of a ternary relationship</a:t>
             </a:r>
           </a:p>
         </p:txBody>
       </p:sp>
-      <p:sp>
-        <p:nvSpPr>
-          <p:cNvPr id="102403" name="Rectangle 1027">
+      <p:pic>
+        <p:nvPicPr>
+          <p:cNvPr id="101379" name="Picture 1029" descr="fig03_18">
             <a:extLst>
               <a:ext uri="{FF2B5EF4-FFF2-40B4-BE49-F238E27FC236}">
-                <a16:creationId xmlns:a16="http://schemas.microsoft.com/office/drawing/2014/main" id="{5FEE5AD0-6BAC-CF83-D65B-9FEDB8151648}"/>
+                <a16:creationId xmlns:a16="http://schemas.microsoft.com/office/drawing/2014/main" id="{9F8E2D8C-EDBF-5085-F3FA-43822441384F}"/>
               </a:ext>
             </a:extLst>
           </p:cNvPr>
-          <p:cNvSpPr>
-            <a:spLocks noGrp="1" noChangeArrowheads="1"/>
-          </p:cNvSpPr>
-          <p:nvPr>
-            <p:ph idx="1"/>
-          </p:nvPr>
-        </p:nvSpPr>
-        <p:spPr/>
-        <p:txBody>
-          <a:bodyPr/>
-          <a:lstStyle/>
-          <a:p>
-            <a:pPr eaLnBrk="1" hangingPunct="1"/>
-            <a:r>
-              <a:rPr lang="en-US" altLang="en-IT" sz="1800" dirty="0">
-                <a:ea typeface="ＭＳ Ｐゴシック" panose="020B0600070205080204" pitchFamily="34" charset="-128"/>
-              </a:rPr>
-              <a:t>The (min, max) constraints can be displayed on the edges – however, they do not fully describe the constraints</a:t>
-            </a:r>
-          </a:p>
-          <a:p>
-            <a:pPr eaLnBrk="1" hangingPunct="1"/>
-            <a:r>
-              <a:rPr lang="en-US" altLang="en-IT" sz="1800" dirty="0">
-                <a:solidFill>
-                  <a:schemeClr val="tx1"/>
-                </a:solidFill>
-                <a:ea typeface="ＭＳ Ｐゴシック" panose="020B0600070205080204" pitchFamily="34" charset="-128"/>
-              </a:rPr>
-              <a:t>Displaying a 1, M, or N indicates additional constraints</a:t>
-            </a:r>
-          </a:p>
-          <a:p>
-            <a:pPr lvl="1" eaLnBrk="1" hangingPunct="1"/>
-            <a:r>
-              <a:rPr lang="en-US" altLang="en-IT" sz="1800" dirty="0">
-                <a:solidFill>
-                  <a:schemeClr val="tx1"/>
-                </a:solidFill>
-                <a:ea typeface="ＭＳ Ｐゴシック" panose="020B0600070205080204" pitchFamily="34" charset="-128"/>
-              </a:rPr>
-              <a:t>An M or N indicates no constraint</a:t>
-            </a:r>
-          </a:p>
-          <a:p>
-            <a:pPr lvl="1" eaLnBrk="1" hangingPunct="1"/>
-            <a:r>
-              <a:rPr lang="en-US" altLang="en-IT" sz="1800" dirty="0">
-                <a:solidFill>
-                  <a:schemeClr val="tx1"/>
-                </a:solidFill>
-                <a:ea typeface="ＭＳ Ｐゴシック" panose="020B0600070205080204" pitchFamily="34" charset="-128"/>
-              </a:rPr>
-              <a:t>A 1 indicates that an entity can participate in at most one relationship instance </a:t>
-            </a:r>
-            <a:r>
-              <a:rPr lang="en-US" altLang="en-IT" sz="1800" i="1" dirty="0">
-                <a:solidFill>
-                  <a:schemeClr val="tx1"/>
-                </a:solidFill>
-                <a:ea typeface="ＭＳ Ｐゴシック" panose="020B0600070205080204" pitchFamily="34" charset="-128"/>
-              </a:rPr>
-              <a:t>that has a particular combination of the other participating entities</a:t>
-            </a:r>
-          </a:p>
-          <a:p>
-            <a:pPr eaLnBrk="1" hangingPunct="1"/>
-            <a:r>
-              <a:rPr lang="en-US" altLang="en-IT" sz="1800" dirty="0">
-                <a:ea typeface="ＭＳ Ｐゴシック" panose="020B0600070205080204" pitchFamily="34" charset="-128"/>
-              </a:rPr>
-              <a:t>In general, both (min, max) and 1, M, or N are needed to describe fully the constraints</a:t>
-            </a:r>
-          </a:p>
-          <a:p>
-            <a:pPr eaLnBrk="1" hangingPunct="1"/>
-            <a:r>
-              <a:rPr lang="en-US" altLang="en-IT" sz="1800" dirty="0">
-                <a:ea typeface="ＭＳ Ｐゴシック" panose="020B0600070205080204" pitchFamily="34" charset="-128"/>
-              </a:rPr>
-              <a:t>Overall, the constraint specification is difficult and possibly ambiguous when we consider relationships of a degree higher than two.</a:t>
-            </a:r>
-          </a:p>
-        </p:txBody>
-      </p:sp>
+          <p:cNvPicPr>
+            <a:picLocks noChangeAspect="1" noChangeArrowheads="1"/>
+          </p:cNvPicPr>
+          <p:nvPr/>
+        </p:nvPicPr>
+        <p:blipFill>
+          <a:blip r:embed="rId2">
+            <a:extLst>
+              <a:ext uri="{28A0092B-C50C-407E-A947-70E740481C1C}">
+                <a14:useLocalDpi xmlns:a14="http://schemas.microsoft.com/office/drawing/2010/main" val="0"/>
+              </a:ext>
+            </a:extLst>
+          </a:blip>
+          <a:srcRect/>
+          <a:stretch>
+            <a:fillRect/>
+          </a:stretch>
+        </p:blipFill>
+        <p:spPr bwMode="auto">
+          <a:xfrm>
+            <a:off x="315913" y="1905000"/>
+            <a:ext cx="7989887" cy="3733800"/>
+          </a:xfrm>
+          <a:prstGeom prst="rect">
+            <a:avLst/>
+          </a:prstGeom>
+          <a:noFill/>
+          <a:ln>
+            <a:noFill/>
+          </a:ln>
+          <a:extLst>
+            <a:ext uri="{909E8E84-426E-40DD-AFC4-6F175D3DCCD1}">
+              <a14:hiddenFill xmlns:a14="http://schemas.microsoft.com/office/drawing/2010/main">
+                <a:solidFill>
+                  <a:srgbClr val="FFFFFF"/>
+                </a:solidFill>
+              </a14:hiddenFill>
+            </a:ext>
+            <a:ext uri="{91240B29-F687-4F45-9708-019B960494DF}">
+              <a14:hiddenLine xmlns:a14="http://schemas.microsoft.com/office/drawing/2010/main" w="9525">
+                <a:solidFill>
+                  <a:srgbClr val="000000"/>
+                </a:solidFill>
+                <a:miter lim="800000"/>
+                <a:headEnd/>
+                <a:tailEnd/>
+              </a14:hiddenLine>
+            </a:ext>
+          </a:extLst>
+        </p:spPr>
+      </p:pic>
     </p:spTree>
   </p:cSld>
   <p:clrMapOvr>
@@ -26082,10 +26822,10 @@
       </p:grpSpPr>
       <p:sp>
         <p:nvSpPr>
-          <p:cNvPr id="103425" name="Title 1">
+          <p:cNvPr id="102402" name="Rectangle 1026">
             <a:extLst>
               <a:ext uri="{FF2B5EF4-FFF2-40B4-BE49-F238E27FC236}">
-                <a16:creationId xmlns:a16="http://schemas.microsoft.com/office/drawing/2014/main" id="{F43438AA-EF11-1D59-3C7D-5C6346F1AE60}"/>
+                <a16:creationId xmlns:a16="http://schemas.microsoft.com/office/drawing/2014/main" id="{07C5F1C5-8B10-64EA-39E3-FB44C4A65ED3}"/>
               </a:ext>
             </a:extLst>
           </p:cNvPr>
@@ -26101,21 +26841,22 @@
           <a:bodyPr/>
           <a:lstStyle/>
           <a:p>
-            <a:r>
-              <a:rPr lang="en-US" altLang="en-IT">
-                <a:ea typeface="ＭＳ Ｐゴシック" panose="020B0600070205080204" pitchFamily="34" charset="-128"/>
-              </a:rPr>
-              <a:t>Another Example: A UNIVERSITY Database</a:t>
+            <a:pPr eaLnBrk="1" hangingPunct="1"/>
+            <a:r>
+              <a:rPr lang="en-US" altLang="en-IT" sz="3200">
+                <a:ea typeface="ＭＳ Ｐゴシック" panose="020B0600070205080204" pitchFamily="34" charset="-128"/>
+              </a:rPr>
+              <a:t>Displaying constraints on higher-degree relationships</a:t>
             </a:r>
           </a:p>
         </p:txBody>
       </p:sp>
       <p:sp>
         <p:nvSpPr>
-          <p:cNvPr id="103426" name="Content Placeholder 2">
+          <p:cNvPr id="102403" name="Rectangle 1027">
             <a:extLst>
               <a:ext uri="{FF2B5EF4-FFF2-40B4-BE49-F238E27FC236}">
-                <a16:creationId xmlns:a16="http://schemas.microsoft.com/office/drawing/2014/main" id="{AB2083E6-5D87-D917-AB26-8B3D07FFFE19}"/>
+                <a16:creationId xmlns:a16="http://schemas.microsoft.com/office/drawing/2014/main" id="{5FEE5AD0-6BAC-CF83-D65B-9FEDB8151648}"/>
               </a:ext>
             </a:extLst>
           </p:cNvPr>
@@ -26131,295 +26872,76 @@
           <a:bodyPr/>
           <a:lstStyle/>
           <a:p>
-            <a:r>
-              <a:rPr lang="en-US" altLang="en-IT">
-                <a:ea typeface="ＭＳ Ｐゴシック" panose="020B0600070205080204" pitchFamily="34" charset="-128"/>
-              </a:rPr>
-              <a:t>To keep track of the enrollments in classes and student grades, another database is to be designed.</a:t>
-            </a:r>
-          </a:p>
-          <a:p>
-            <a:r>
-              <a:rPr lang="en-US" altLang="en-IT">
-                <a:ea typeface="ＭＳ Ｐゴシック" panose="020B0600070205080204" pitchFamily="34" charset="-128"/>
-              </a:rPr>
-              <a:t>It keeps track of the COLLEGEs, DEPARTMENTs within each college, the COURSEs offered by departments, and SECTIONs of courses, INSTRUCTORs who teach the sections etc.</a:t>
-            </a:r>
-          </a:p>
-          <a:p>
-            <a:r>
-              <a:rPr lang="en-US" altLang="en-IT">
-                <a:ea typeface="ＭＳ Ｐゴシック" panose="020B0600070205080204" pitchFamily="34" charset="-128"/>
-              </a:rPr>
-              <a:t>These entity types and the relationships among these entity types are shown on the next slide in Figure 3.20.</a:t>
-            </a:r>
-          </a:p>
-        </p:txBody>
-      </p:sp>
-      <p:sp>
-        <p:nvSpPr>
-          <p:cNvPr id="103427" name="Slide Number Placeholder 3">
-            <a:extLst>
-              <a:ext uri="{FF2B5EF4-FFF2-40B4-BE49-F238E27FC236}">
-                <a16:creationId xmlns:a16="http://schemas.microsoft.com/office/drawing/2014/main" id="{2AC9CA6C-BE5C-3CA4-94DE-B10EA9826B66}"/>
-              </a:ext>
-            </a:extLst>
-          </p:cNvPr>
-          <p:cNvSpPr>
-            <a:spLocks noGrp="1"/>
-          </p:cNvSpPr>
-          <p:nvPr>
-            <p:ph type="sldNum" sz="quarter" idx="4294967295"/>
-          </p:nvPr>
-        </p:nvSpPr>
-        <p:spPr>
-          <a:xfrm>
-            <a:off x="7239000" y="6400800"/>
-            <a:ext cx="1905000" cy="457200"/>
-          </a:xfrm>
-          <a:prstGeom prst="rect">
-            <a:avLst/>
-          </a:prstGeom>
-          <a:noFill/>
-          <a:ln/>
-          <a:extLst>
-            <a:ext uri="{909E8E84-426E-40DD-AFC4-6F175D3DCCD1}">
-              <a14:hiddenFill xmlns:a14="http://schemas.microsoft.com/office/drawing/2010/main">
-                <a:solidFill>
-                  <a:srgbClr val="FFFFFF"/>
-                </a:solidFill>
-              </a14:hiddenFill>
-            </a:ext>
-            <a:ext uri="{91240B29-F687-4F45-9708-019B960494DF}">
-              <a14:hiddenLine xmlns:a14="http://schemas.microsoft.com/office/drawing/2010/main" w="9525">
-                <a:solidFill>
-                  <a:srgbClr val="000000"/>
-                </a:solidFill>
-                <a:miter lim="800000"/>
-                <a:headEnd/>
-                <a:tailEnd/>
-              </a14:hiddenLine>
-            </a:ext>
-          </a:extLst>
-        </p:spPr>
-        <p:txBody>
-          <a:bodyPr/>
-          <a:lstStyle>
-            <a:lvl1pPr>
-              <a:spcBef>
-                <a:spcPct val="20000"/>
-              </a:spcBef>
-              <a:buClr>
-                <a:srgbClr val="990033"/>
-              </a:buClr>
-              <a:buSzPct val="60000"/>
-              <a:buFont typeface="Wingdings" pitchFamily="2" charset="2"/>
-              <a:buChar char="n"/>
-              <a:defRPr sz="2800">
-                <a:solidFill>
-                  <a:schemeClr val="tx2"/>
-                </a:solidFill>
-                <a:latin typeface="Arial" panose="020B0604020202020204" pitchFamily="34" charset="0"/>
-                <a:ea typeface="ＭＳ Ｐゴシック" panose="020B0600070205080204" pitchFamily="34" charset="-128"/>
-              </a:defRPr>
-            </a:lvl1pPr>
-            <a:lvl2pPr marL="742950" indent="-285750">
-              <a:spcBef>
-                <a:spcPct val="20000"/>
-              </a:spcBef>
-              <a:buClr>
-                <a:schemeClr val="tx2"/>
-              </a:buClr>
-              <a:buSzPct val="55000"/>
-              <a:buFont typeface="Wingdings" pitchFamily="2" charset="2"/>
-              <a:buChar char="n"/>
-              <a:defRPr sz="2600">
-                <a:solidFill>
-                  <a:srgbClr val="800000"/>
-                </a:solidFill>
-                <a:latin typeface="Arial" panose="020B0604020202020204" pitchFamily="34" charset="0"/>
-                <a:ea typeface="ＭＳ Ｐゴシック" panose="020B0600070205080204" pitchFamily="34" charset="-128"/>
-              </a:defRPr>
-            </a:lvl2pPr>
-            <a:lvl3pPr marL="1143000" indent="-228600">
-              <a:spcBef>
-                <a:spcPct val="20000"/>
-              </a:spcBef>
-              <a:buClr>
-                <a:srgbClr val="990033"/>
-              </a:buClr>
-              <a:buSzPct val="50000"/>
-              <a:buFont typeface="Wingdings" pitchFamily="2" charset="2"/>
-              <a:buChar char="n"/>
-              <a:defRPr sz="2400">
-                <a:solidFill>
-                  <a:schemeClr val="tx2"/>
-                </a:solidFill>
-                <a:latin typeface="Arial" panose="020B0604020202020204" pitchFamily="34" charset="0"/>
-                <a:ea typeface="ＭＳ Ｐゴシック" panose="020B0600070205080204" pitchFamily="34" charset="-128"/>
-              </a:defRPr>
-            </a:lvl3pPr>
-            <a:lvl4pPr marL="1600200" indent="-228600">
-              <a:spcBef>
-                <a:spcPct val="20000"/>
-              </a:spcBef>
-              <a:buClr>
-                <a:schemeClr val="tx2"/>
-              </a:buClr>
-              <a:buSzPct val="55000"/>
-              <a:buFont typeface="Wingdings" pitchFamily="2" charset="2"/>
-              <a:buChar char="n"/>
-              <a:defRPr sz="2000">
-                <a:solidFill>
-                  <a:srgbClr val="800000"/>
-                </a:solidFill>
-                <a:latin typeface="Arial" panose="020B0604020202020204" pitchFamily="34" charset="0"/>
-                <a:ea typeface="ＭＳ Ｐゴシック" panose="020B0600070205080204" pitchFamily="34" charset="-128"/>
-              </a:defRPr>
-            </a:lvl4pPr>
-            <a:lvl5pPr marL="2057400" indent="-228600">
-              <a:spcBef>
-                <a:spcPct val="20000"/>
-              </a:spcBef>
-              <a:buClr>
-                <a:srgbClr val="990033"/>
-              </a:buClr>
-              <a:buSzPct val="50000"/>
-              <a:buFont typeface="Wingdings" pitchFamily="2" charset="2"/>
-              <a:buChar char="n"/>
-              <a:defRPr sz="2000">
-                <a:solidFill>
-                  <a:schemeClr val="tx2"/>
-                </a:solidFill>
-                <a:latin typeface="Arial" panose="020B0604020202020204" pitchFamily="34" charset="0"/>
-                <a:ea typeface="ＭＳ Ｐゴシック" panose="020B0600070205080204" pitchFamily="34" charset="-128"/>
-              </a:defRPr>
-            </a:lvl5pPr>
-            <a:lvl6pPr marL="2514600" indent="-228600" eaLnBrk="0" fontAlgn="base" hangingPunct="0">
-              <a:spcBef>
-                <a:spcPct val="20000"/>
-              </a:spcBef>
-              <a:spcAft>
-                <a:spcPct val="0"/>
-              </a:spcAft>
-              <a:buClr>
-                <a:srgbClr val="990033"/>
-              </a:buClr>
-              <a:buSzPct val="50000"/>
-              <a:buFont typeface="Wingdings" pitchFamily="2" charset="2"/>
-              <a:buChar char="n"/>
-              <a:defRPr sz="2000">
-                <a:solidFill>
-                  <a:schemeClr val="tx2"/>
-                </a:solidFill>
-                <a:latin typeface="Arial" panose="020B0604020202020204" pitchFamily="34" charset="0"/>
-                <a:ea typeface="ＭＳ Ｐゴシック" panose="020B0600070205080204" pitchFamily="34" charset="-128"/>
-              </a:defRPr>
-            </a:lvl6pPr>
-            <a:lvl7pPr marL="2971800" indent="-228600" eaLnBrk="0" fontAlgn="base" hangingPunct="0">
-              <a:spcBef>
-                <a:spcPct val="20000"/>
-              </a:spcBef>
-              <a:spcAft>
-                <a:spcPct val="0"/>
-              </a:spcAft>
-              <a:buClr>
-                <a:srgbClr val="990033"/>
-              </a:buClr>
-              <a:buSzPct val="50000"/>
-              <a:buFont typeface="Wingdings" pitchFamily="2" charset="2"/>
-              <a:buChar char="n"/>
-              <a:defRPr sz="2000">
-                <a:solidFill>
-                  <a:schemeClr val="tx2"/>
-                </a:solidFill>
-                <a:latin typeface="Arial" panose="020B0604020202020204" pitchFamily="34" charset="0"/>
-                <a:ea typeface="ＭＳ Ｐゴシック" panose="020B0600070205080204" pitchFamily="34" charset="-128"/>
-              </a:defRPr>
-            </a:lvl7pPr>
-            <a:lvl8pPr marL="3429000" indent="-228600" eaLnBrk="0" fontAlgn="base" hangingPunct="0">
-              <a:spcBef>
-                <a:spcPct val="20000"/>
-              </a:spcBef>
-              <a:spcAft>
-                <a:spcPct val="0"/>
-              </a:spcAft>
-              <a:buClr>
-                <a:srgbClr val="990033"/>
-              </a:buClr>
-              <a:buSzPct val="50000"/>
-              <a:buFont typeface="Wingdings" pitchFamily="2" charset="2"/>
-              <a:buChar char="n"/>
-              <a:defRPr sz="2000">
-                <a:solidFill>
-                  <a:schemeClr val="tx2"/>
-                </a:solidFill>
-                <a:latin typeface="Arial" panose="020B0604020202020204" pitchFamily="34" charset="0"/>
-                <a:ea typeface="ＭＳ Ｐゴシック" panose="020B0600070205080204" pitchFamily="34" charset="-128"/>
-              </a:defRPr>
-            </a:lvl8pPr>
-            <a:lvl9pPr marL="3886200" indent="-228600" eaLnBrk="0" fontAlgn="base" hangingPunct="0">
-              <a:spcBef>
-                <a:spcPct val="20000"/>
-              </a:spcBef>
-              <a:spcAft>
-                <a:spcPct val="0"/>
-              </a:spcAft>
-              <a:buClr>
-                <a:srgbClr val="990033"/>
-              </a:buClr>
-              <a:buSzPct val="50000"/>
-              <a:buFont typeface="Wingdings" pitchFamily="2" charset="2"/>
-              <a:buChar char="n"/>
-              <a:defRPr sz="2000">
-                <a:solidFill>
-                  <a:schemeClr val="tx2"/>
-                </a:solidFill>
-                <a:latin typeface="Arial" panose="020B0604020202020204" pitchFamily="34" charset="0"/>
-                <a:ea typeface="ＭＳ Ｐゴシック" panose="020B0600070205080204" pitchFamily="34" charset="-128"/>
-              </a:defRPr>
-            </a:lvl9pPr>
-          </a:lstStyle>
-          <a:p>
-            <a:pPr>
-              <a:spcBef>
-                <a:spcPct val="0"/>
-              </a:spcBef>
-              <a:buClrTx/>
-              <a:buSzTx/>
-              <a:buFontTx/>
-              <a:buNone/>
-            </a:pPr>
-            <a:r>
-              <a:rPr lang="en-US" altLang="en-IT" sz="1400">
-                <a:solidFill>
-                  <a:srgbClr val="990033"/>
-                </a:solidFill>
-              </a:rPr>
-              <a:t>Slide 3- </a:t>
-            </a:r>
-            <a:fld id="{2BC91422-9E22-4147-9758-8422BCF74BDF}" type="slidenum">
-              <a:rPr lang="en-US" altLang="en-IT" sz="1400" smtClean="0">
-                <a:solidFill>
-                  <a:srgbClr val="990033"/>
-                </a:solidFill>
-              </a:rPr>
-              <a:pPr>
-                <a:spcBef>
-                  <a:spcPct val="0"/>
-                </a:spcBef>
-                <a:buClrTx/>
-                <a:buSzTx/>
-                <a:buFontTx/>
-                <a:buNone/>
-              </a:pPr>
-              <a:t>54</a:t>
-            </a:fld>
-            <a:endParaRPr lang="en-CA" altLang="en-IT" sz="1400">
-              <a:solidFill>
-                <a:srgbClr val="990033"/>
-              </a:solidFill>
-            </a:endParaRPr>
+            <a:pPr eaLnBrk="1" hangingPunct="1"/>
+            <a:r>
+              <a:rPr lang="en-US" altLang="en-IT" sz="1800" dirty="0">
+                <a:ea typeface="ＭＳ Ｐゴシック" panose="020B0600070205080204" pitchFamily="34" charset="-128"/>
+              </a:rPr>
+              <a:t>The (min, max) constraints can be displayed on the edges – however, they do not fully describe the constraints</a:t>
+            </a:r>
+          </a:p>
+          <a:p>
+            <a:pPr eaLnBrk="1" hangingPunct="1"/>
+            <a:r>
+              <a:rPr lang="en-US" altLang="en-IT" sz="1800" dirty="0">
+                <a:solidFill>
+                  <a:schemeClr val="tx1"/>
+                </a:solidFill>
+                <a:ea typeface="ＭＳ Ｐゴシック" panose="020B0600070205080204" pitchFamily="34" charset="-128"/>
+              </a:rPr>
+              <a:t>Displaying a 1, M, or N indicates additional constraints</a:t>
+            </a:r>
+          </a:p>
+          <a:p>
+            <a:pPr lvl="1" eaLnBrk="1" hangingPunct="1"/>
+            <a:r>
+              <a:rPr lang="en-US" altLang="en-IT" sz="1800" dirty="0">
+                <a:solidFill>
+                  <a:schemeClr val="tx1"/>
+                </a:solidFill>
+                <a:ea typeface="ＭＳ Ｐゴシック" panose="020B0600070205080204" pitchFamily="34" charset="-128"/>
+              </a:rPr>
+              <a:t>An M or N indicates no constraint</a:t>
+            </a:r>
+          </a:p>
+          <a:p>
+            <a:pPr lvl="1" eaLnBrk="1" hangingPunct="1"/>
+            <a:r>
+              <a:rPr lang="en-US" altLang="en-IT" sz="1800" dirty="0">
+                <a:solidFill>
+                  <a:schemeClr val="tx1"/>
+                </a:solidFill>
+                <a:ea typeface="ＭＳ Ｐゴシック" panose="020B0600070205080204" pitchFamily="34" charset="-128"/>
+              </a:rPr>
+              <a:t>A 1 indicates that an entity can participate in at most one relationship instance </a:t>
+            </a:r>
+            <a:r>
+              <a:rPr lang="en-US" altLang="en-IT" sz="1800" i="1" dirty="0">
+                <a:solidFill>
+                  <a:schemeClr val="tx1"/>
+                </a:solidFill>
+                <a:ea typeface="ＭＳ Ｐゴシック" panose="020B0600070205080204" pitchFamily="34" charset="-128"/>
+              </a:rPr>
+              <a:t>that has a particular combination of the other participating entities</a:t>
+            </a:r>
+          </a:p>
+          <a:p>
+            <a:pPr eaLnBrk="1" hangingPunct="1"/>
+            <a:r>
+              <a:rPr lang="en-US" altLang="en-IT" sz="1800" dirty="0">
+                <a:ea typeface="ＭＳ Ｐゴシック" panose="020B0600070205080204" pitchFamily="34" charset="-128"/>
+              </a:rPr>
+              <a:t>In general, both (min, max) and 1, M, or N are needed to describe fully the constraints</a:t>
+            </a:r>
+          </a:p>
+          <a:p>
+            <a:pPr eaLnBrk="1" hangingPunct="1"/>
+            <a:r>
+              <a:rPr lang="en-US" altLang="en-IT" sz="1800" dirty="0">
+                <a:ea typeface="ＭＳ Ｐゴシック" panose="020B0600070205080204" pitchFamily="34" charset="-128"/>
+              </a:rPr>
+              <a:t>Overall, the constraint specification is difficult and possibly ambiguous when we consider relationships of a degree higher than two.</a:t>
+            </a:r>
           </a:p>
         </p:txBody>
       </p:sp>
@@ -26451,10 +26973,10 @@
       </p:grpSpPr>
       <p:sp>
         <p:nvSpPr>
-          <p:cNvPr id="104449" name="Title 1">
+          <p:cNvPr id="103425" name="Title 1">
             <a:extLst>
               <a:ext uri="{FF2B5EF4-FFF2-40B4-BE49-F238E27FC236}">
-                <a16:creationId xmlns:a16="http://schemas.microsoft.com/office/drawing/2014/main" id="{915D436B-39A7-057C-7EED-E24045889343}"/>
+                <a16:creationId xmlns:a16="http://schemas.microsoft.com/office/drawing/2014/main" id="{F43438AA-EF11-1D59-3C7D-5C6346F1AE60}"/>
               </a:ext>
             </a:extLst>
           </p:cNvPr>
@@ -26470,23 +26992,67 @@
           <a:bodyPr/>
           <a:lstStyle/>
           <a:p>
-            <a:pPr eaLnBrk="1" hangingPunct="1"/>
             <a:r>
               <a:rPr lang="en-US" altLang="en-IT">
-                <a:latin typeface="Calibri Light" panose="020F0302020204030204" pitchFamily="34" charset="0"/>
-                <a:ea typeface="ＭＳ Ｐゴシック" panose="020B0600070205080204" pitchFamily="34" charset="-128"/>
-              </a:rPr>
-              <a:t>UNIVERSITY database conceptual schema</a:t>
+                <a:ea typeface="ＭＳ Ｐゴシック" panose="020B0600070205080204" pitchFamily="34" charset="-128"/>
+              </a:rPr>
+              <a:t>Another Example: A UNIVERSITY Database</a:t>
             </a:r>
           </a:p>
         </p:txBody>
       </p:sp>
       <p:sp>
         <p:nvSpPr>
-          <p:cNvPr id="104451" name="Footer Placeholder 1">
+          <p:cNvPr id="103426" name="Content Placeholder 2">
             <a:extLst>
               <a:ext uri="{FF2B5EF4-FFF2-40B4-BE49-F238E27FC236}">
-                <a16:creationId xmlns:a16="http://schemas.microsoft.com/office/drawing/2014/main" id="{AF6F96EF-0473-1FAC-6A29-B6E379D8BB54}"/>
+                <a16:creationId xmlns:a16="http://schemas.microsoft.com/office/drawing/2014/main" id="{AB2083E6-5D87-D917-AB26-8B3D07FFFE19}"/>
+              </a:ext>
+            </a:extLst>
+          </p:cNvPr>
+          <p:cNvSpPr>
+            <a:spLocks noGrp="1" noChangeArrowheads="1"/>
+          </p:cNvSpPr>
+          <p:nvPr>
+            <p:ph idx="1"/>
+          </p:nvPr>
+        </p:nvSpPr>
+        <p:spPr/>
+        <p:txBody>
+          <a:bodyPr/>
+          <a:lstStyle/>
+          <a:p>
+            <a:r>
+              <a:rPr lang="en-US" altLang="en-IT">
+                <a:ea typeface="ＭＳ Ｐゴシック" panose="020B0600070205080204" pitchFamily="34" charset="-128"/>
+              </a:rPr>
+              <a:t>To keep track of the enrollments in classes and student grades, another database is to be designed.</a:t>
+            </a:r>
+          </a:p>
+          <a:p>
+            <a:r>
+              <a:rPr lang="en-US" altLang="en-IT">
+                <a:ea typeface="ＭＳ Ｐゴシック" panose="020B0600070205080204" pitchFamily="34" charset="-128"/>
+              </a:rPr>
+              <a:t>It keeps track of the COLLEGEs, DEPARTMENTs within each college, the COURSEs offered by departments, and SECTIONs of courses, INSTRUCTORs who teach the sections etc.</a:t>
+            </a:r>
+          </a:p>
+          <a:p>
+            <a:r>
+              <a:rPr lang="en-US" altLang="en-IT">
+                <a:ea typeface="ＭＳ Ｐゴシック" panose="020B0600070205080204" pitchFamily="34" charset="-128"/>
+              </a:rPr>
+              <a:t>These entity types and the relationships among these entity types are shown on the next slide in Figure 3.20.</a:t>
+            </a:r>
+          </a:p>
+        </p:txBody>
+      </p:sp>
+      <p:sp>
+        <p:nvSpPr>
+          <p:cNvPr id="103427" name="Slide Number Placeholder 3">
+            <a:extLst>
+              <a:ext uri="{FF2B5EF4-FFF2-40B4-BE49-F238E27FC236}">
+                <a16:creationId xmlns:a16="http://schemas.microsoft.com/office/drawing/2014/main" id="{2AC9CA6C-BE5C-3CA4-94DE-B10EA9826B66}"/>
               </a:ext>
             </a:extLst>
           </p:cNvPr>
@@ -26494,18 +27060,19 @@
             <a:spLocks noGrp="1"/>
           </p:cNvSpPr>
           <p:nvPr>
-            <p:ph type="ftr" sz="quarter" idx="4294967295"/>
+            <p:ph type="sldNum" sz="quarter" idx="4294967295"/>
           </p:nvPr>
         </p:nvSpPr>
-        <p:spPr bwMode="auto">
+        <p:spPr>
           <a:xfrm>
-            <a:off x="0" y="6356350"/>
-            <a:ext cx="3086100" cy="365125"/>
+            <a:off x="7239000" y="6400800"/>
+            <a:ext cx="1905000" cy="457200"/>
           </a:xfrm>
           <a:prstGeom prst="rect">
             <a:avLst/>
           </a:prstGeom>
           <a:noFill/>
+          <a:ln/>
           <a:extLst>
             <a:ext uri="{909E8E84-426E-40DD-AFC4-6F175D3DCCD1}">
               <a14:hiddenFill xmlns:a14="http://schemas.microsoft.com/office/drawing/2010/main">
@@ -26715,6 +27282,330 @@
               <a:buNone/>
             </a:pPr>
             <a:r>
+              <a:rPr lang="en-US" altLang="en-IT" sz="1400">
+                <a:solidFill>
+                  <a:srgbClr val="990033"/>
+                </a:solidFill>
+              </a:rPr>
+              <a:t>Slide 3- </a:t>
+            </a:r>
+            <a:fld id="{2BC91422-9E22-4147-9758-8422BCF74BDF}" type="slidenum">
+              <a:rPr lang="en-US" altLang="en-IT" sz="1400" smtClean="0">
+                <a:solidFill>
+                  <a:srgbClr val="990033"/>
+                </a:solidFill>
+              </a:rPr>
+              <a:pPr>
+                <a:spcBef>
+                  <a:spcPct val="0"/>
+                </a:spcBef>
+                <a:buClrTx/>
+                <a:buSzTx/>
+                <a:buFontTx/>
+                <a:buNone/>
+              </a:pPr>
+              <a:t>55</a:t>
+            </a:fld>
+            <a:endParaRPr lang="en-CA" altLang="en-IT" sz="1400">
+              <a:solidFill>
+                <a:srgbClr val="990033"/>
+              </a:solidFill>
+            </a:endParaRPr>
+          </a:p>
+        </p:txBody>
+      </p:sp>
+    </p:spTree>
+  </p:cSld>
+  <p:clrMapOvr>
+    <a:masterClrMapping/>
+  </p:clrMapOvr>
+  <p:transition spd="med"/>
+</p:sld>
+</file>
+
+<file path=ppt/slides/slide56.xml><?xml version="1.0" encoding="utf-8"?>
+<p:sld xmlns:a="http://schemas.openxmlformats.org/drawingml/2006/main" xmlns:r="http://schemas.openxmlformats.org/officeDocument/2006/relationships" xmlns:p="http://schemas.openxmlformats.org/presentationml/2006/main">
+  <p:cSld>
+    <p:spTree>
+      <p:nvGrpSpPr>
+        <p:cNvPr id="1" name=""/>
+        <p:cNvGrpSpPr/>
+        <p:nvPr/>
+      </p:nvGrpSpPr>
+      <p:grpSpPr>
+        <a:xfrm>
+          <a:off x="0" y="0"/>
+          <a:ext cx="0" cy="0"/>
+          <a:chOff x="0" y="0"/>
+          <a:chExt cx="0" cy="0"/>
+        </a:xfrm>
+      </p:grpSpPr>
+      <p:sp>
+        <p:nvSpPr>
+          <p:cNvPr id="104449" name="Title 1">
+            <a:extLst>
+              <a:ext uri="{FF2B5EF4-FFF2-40B4-BE49-F238E27FC236}">
+                <a16:creationId xmlns:a16="http://schemas.microsoft.com/office/drawing/2014/main" id="{915D436B-39A7-057C-7EED-E24045889343}"/>
+              </a:ext>
+            </a:extLst>
+          </p:cNvPr>
+          <p:cNvSpPr>
+            <a:spLocks noGrp="1" noChangeArrowheads="1"/>
+          </p:cNvSpPr>
+          <p:nvPr>
+            <p:ph type="title"/>
+          </p:nvPr>
+        </p:nvSpPr>
+        <p:spPr/>
+        <p:txBody>
+          <a:bodyPr/>
+          <a:lstStyle/>
+          <a:p>
+            <a:pPr eaLnBrk="1" hangingPunct="1"/>
+            <a:r>
+              <a:rPr lang="en-US" altLang="en-IT">
+                <a:latin typeface="Calibri Light" panose="020F0302020204030204" pitchFamily="34" charset="0"/>
+                <a:ea typeface="ＭＳ Ｐゴシック" panose="020B0600070205080204" pitchFamily="34" charset="-128"/>
+              </a:rPr>
+              <a:t>UNIVERSITY database conceptual schema</a:t>
+            </a:r>
+          </a:p>
+        </p:txBody>
+      </p:sp>
+      <p:sp>
+        <p:nvSpPr>
+          <p:cNvPr id="104451" name="Footer Placeholder 1">
+            <a:extLst>
+              <a:ext uri="{FF2B5EF4-FFF2-40B4-BE49-F238E27FC236}">
+                <a16:creationId xmlns:a16="http://schemas.microsoft.com/office/drawing/2014/main" id="{AF6F96EF-0473-1FAC-6A29-B6E379D8BB54}"/>
+              </a:ext>
+            </a:extLst>
+          </p:cNvPr>
+          <p:cNvSpPr>
+            <a:spLocks noGrp="1"/>
+          </p:cNvSpPr>
+          <p:nvPr>
+            <p:ph type="ftr" sz="quarter" idx="4294967295"/>
+          </p:nvPr>
+        </p:nvSpPr>
+        <p:spPr bwMode="auto">
+          <a:xfrm>
+            <a:off x="0" y="6356350"/>
+            <a:ext cx="3086100" cy="365125"/>
+          </a:xfrm>
+          <a:prstGeom prst="rect">
+            <a:avLst/>
+          </a:prstGeom>
+          <a:noFill/>
+          <a:extLst>
+            <a:ext uri="{909E8E84-426E-40DD-AFC4-6F175D3DCCD1}">
+              <a14:hiddenFill xmlns:a14="http://schemas.microsoft.com/office/drawing/2010/main">
+                <a:solidFill>
+                  <a:srgbClr val="FFFFFF"/>
+                </a:solidFill>
+              </a14:hiddenFill>
+            </a:ext>
+            <a:ext uri="{91240B29-F687-4F45-9708-019B960494DF}">
+              <a14:hiddenLine xmlns:a14="http://schemas.microsoft.com/office/drawing/2010/main" w="9525">
+                <a:solidFill>
+                  <a:srgbClr val="000000"/>
+                </a:solidFill>
+                <a:miter lim="800000"/>
+                <a:headEnd/>
+                <a:tailEnd/>
+              </a14:hiddenLine>
+            </a:ext>
+          </a:extLst>
+        </p:spPr>
+        <p:txBody>
+          <a:bodyPr/>
+          <a:lstStyle>
+            <a:lvl1pPr>
+              <a:spcBef>
+                <a:spcPct val="20000"/>
+              </a:spcBef>
+              <a:buClr>
+                <a:srgbClr val="990033"/>
+              </a:buClr>
+              <a:buSzPct val="60000"/>
+              <a:buFont typeface="Wingdings" pitchFamily="2" charset="2"/>
+              <a:buChar char="n"/>
+              <a:defRPr sz="2800">
+                <a:solidFill>
+                  <a:schemeClr val="tx2"/>
+                </a:solidFill>
+                <a:latin typeface="Arial" panose="020B0604020202020204" pitchFamily="34" charset="0"/>
+                <a:ea typeface="ＭＳ Ｐゴシック" panose="020B0600070205080204" pitchFamily="34" charset="-128"/>
+              </a:defRPr>
+            </a:lvl1pPr>
+            <a:lvl2pPr marL="742950" indent="-285750">
+              <a:spcBef>
+                <a:spcPct val="20000"/>
+              </a:spcBef>
+              <a:buClr>
+                <a:schemeClr val="tx2"/>
+              </a:buClr>
+              <a:buSzPct val="55000"/>
+              <a:buFont typeface="Wingdings" pitchFamily="2" charset="2"/>
+              <a:buChar char="n"/>
+              <a:defRPr sz="2600">
+                <a:solidFill>
+                  <a:srgbClr val="800000"/>
+                </a:solidFill>
+                <a:latin typeface="Arial" panose="020B0604020202020204" pitchFamily="34" charset="0"/>
+                <a:ea typeface="ＭＳ Ｐゴシック" panose="020B0600070205080204" pitchFamily="34" charset="-128"/>
+              </a:defRPr>
+            </a:lvl2pPr>
+            <a:lvl3pPr marL="1143000" indent="-228600">
+              <a:spcBef>
+                <a:spcPct val="20000"/>
+              </a:spcBef>
+              <a:buClr>
+                <a:srgbClr val="990033"/>
+              </a:buClr>
+              <a:buSzPct val="50000"/>
+              <a:buFont typeface="Wingdings" pitchFamily="2" charset="2"/>
+              <a:buChar char="n"/>
+              <a:defRPr sz="2400">
+                <a:solidFill>
+                  <a:schemeClr val="tx2"/>
+                </a:solidFill>
+                <a:latin typeface="Arial" panose="020B0604020202020204" pitchFamily="34" charset="0"/>
+                <a:ea typeface="ＭＳ Ｐゴシック" panose="020B0600070205080204" pitchFamily="34" charset="-128"/>
+              </a:defRPr>
+            </a:lvl3pPr>
+            <a:lvl4pPr marL="1600200" indent="-228600">
+              <a:spcBef>
+                <a:spcPct val="20000"/>
+              </a:spcBef>
+              <a:buClr>
+                <a:schemeClr val="tx2"/>
+              </a:buClr>
+              <a:buSzPct val="55000"/>
+              <a:buFont typeface="Wingdings" pitchFamily="2" charset="2"/>
+              <a:buChar char="n"/>
+              <a:defRPr sz="2000">
+                <a:solidFill>
+                  <a:srgbClr val="800000"/>
+                </a:solidFill>
+                <a:latin typeface="Arial" panose="020B0604020202020204" pitchFamily="34" charset="0"/>
+                <a:ea typeface="ＭＳ Ｐゴシック" panose="020B0600070205080204" pitchFamily="34" charset="-128"/>
+              </a:defRPr>
+            </a:lvl4pPr>
+            <a:lvl5pPr marL="2057400" indent="-228600">
+              <a:spcBef>
+                <a:spcPct val="20000"/>
+              </a:spcBef>
+              <a:buClr>
+                <a:srgbClr val="990033"/>
+              </a:buClr>
+              <a:buSzPct val="50000"/>
+              <a:buFont typeface="Wingdings" pitchFamily="2" charset="2"/>
+              <a:buChar char="n"/>
+              <a:defRPr sz="2000">
+                <a:solidFill>
+                  <a:schemeClr val="tx2"/>
+                </a:solidFill>
+                <a:latin typeface="Arial" panose="020B0604020202020204" pitchFamily="34" charset="0"/>
+                <a:ea typeface="ＭＳ Ｐゴシック" panose="020B0600070205080204" pitchFamily="34" charset="-128"/>
+              </a:defRPr>
+            </a:lvl5pPr>
+            <a:lvl6pPr marL="2514600" indent="-228600" eaLnBrk="0" fontAlgn="base" hangingPunct="0">
+              <a:spcBef>
+                <a:spcPct val="20000"/>
+              </a:spcBef>
+              <a:spcAft>
+                <a:spcPct val="0"/>
+              </a:spcAft>
+              <a:buClr>
+                <a:srgbClr val="990033"/>
+              </a:buClr>
+              <a:buSzPct val="50000"/>
+              <a:buFont typeface="Wingdings" pitchFamily="2" charset="2"/>
+              <a:buChar char="n"/>
+              <a:defRPr sz="2000">
+                <a:solidFill>
+                  <a:schemeClr val="tx2"/>
+                </a:solidFill>
+                <a:latin typeface="Arial" panose="020B0604020202020204" pitchFamily="34" charset="0"/>
+                <a:ea typeface="ＭＳ Ｐゴシック" panose="020B0600070205080204" pitchFamily="34" charset="-128"/>
+              </a:defRPr>
+            </a:lvl6pPr>
+            <a:lvl7pPr marL="2971800" indent="-228600" eaLnBrk="0" fontAlgn="base" hangingPunct="0">
+              <a:spcBef>
+                <a:spcPct val="20000"/>
+              </a:spcBef>
+              <a:spcAft>
+                <a:spcPct val="0"/>
+              </a:spcAft>
+              <a:buClr>
+                <a:srgbClr val="990033"/>
+              </a:buClr>
+              <a:buSzPct val="50000"/>
+              <a:buFont typeface="Wingdings" pitchFamily="2" charset="2"/>
+              <a:buChar char="n"/>
+              <a:defRPr sz="2000">
+                <a:solidFill>
+                  <a:schemeClr val="tx2"/>
+                </a:solidFill>
+                <a:latin typeface="Arial" panose="020B0604020202020204" pitchFamily="34" charset="0"/>
+                <a:ea typeface="ＭＳ Ｐゴシック" panose="020B0600070205080204" pitchFamily="34" charset="-128"/>
+              </a:defRPr>
+            </a:lvl7pPr>
+            <a:lvl8pPr marL="3429000" indent="-228600" eaLnBrk="0" fontAlgn="base" hangingPunct="0">
+              <a:spcBef>
+                <a:spcPct val="20000"/>
+              </a:spcBef>
+              <a:spcAft>
+                <a:spcPct val="0"/>
+              </a:spcAft>
+              <a:buClr>
+                <a:srgbClr val="990033"/>
+              </a:buClr>
+              <a:buSzPct val="50000"/>
+              <a:buFont typeface="Wingdings" pitchFamily="2" charset="2"/>
+              <a:buChar char="n"/>
+              <a:defRPr sz="2000">
+                <a:solidFill>
+                  <a:schemeClr val="tx2"/>
+                </a:solidFill>
+                <a:latin typeface="Arial" panose="020B0604020202020204" pitchFamily="34" charset="0"/>
+                <a:ea typeface="ＭＳ Ｐゴシック" panose="020B0600070205080204" pitchFamily="34" charset="-128"/>
+              </a:defRPr>
+            </a:lvl8pPr>
+            <a:lvl9pPr marL="3886200" indent="-228600" eaLnBrk="0" fontAlgn="base" hangingPunct="0">
+              <a:spcBef>
+                <a:spcPct val="20000"/>
+              </a:spcBef>
+              <a:spcAft>
+                <a:spcPct val="0"/>
+              </a:spcAft>
+              <a:buClr>
+                <a:srgbClr val="990033"/>
+              </a:buClr>
+              <a:buSzPct val="50000"/>
+              <a:buFont typeface="Wingdings" pitchFamily="2" charset="2"/>
+              <a:buChar char="n"/>
+              <a:defRPr sz="2000">
+                <a:solidFill>
+                  <a:schemeClr val="tx2"/>
+                </a:solidFill>
+                <a:latin typeface="Arial" panose="020B0604020202020204" pitchFamily="34" charset="0"/>
+                <a:ea typeface="ＭＳ Ｐゴシック" panose="020B0600070205080204" pitchFamily="34" charset="-128"/>
+              </a:defRPr>
+            </a:lvl9pPr>
+          </a:lstStyle>
+          <a:p>
+            <a:pPr>
+              <a:spcBef>
+                <a:spcPct val="0"/>
+              </a:spcBef>
+              <a:buClrTx/>
+              <a:buSzTx/>
+              <a:buFontTx/>
+              <a:buNone/>
+            </a:pPr>
+            <a:r>
               <a:rPr lang="en-US" altLang="en-IT" sz="900">
                 <a:solidFill>
                   <a:srgbClr val="898989"/>
@@ -26982,7 +27873,7 @@
                 <a:buFontTx/>
                 <a:buNone/>
               </a:pPr>
-              <a:t>55</a:t>
+              <a:t>56</a:t>
             </a:fld>
             <a:endParaRPr lang="en-CA" altLang="en-IT" sz="1400">
               <a:solidFill>
@@ -27181,7 +28072,7 @@
 </p:sld>
 </file>
 
-<file path=ppt/slides/slide56.xml><?xml version="1.0" encoding="utf-8"?>
+<file path=ppt/slides/slide57.xml><?xml version="1.0" encoding="utf-8"?>
 <p:sld xmlns:a="http://schemas.openxmlformats.org/drawingml/2006/main" xmlns:r="http://schemas.openxmlformats.org/officeDocument/2006/relationships" xmlns:p="http://schemas.openxmlformats.org/presentationml/2006/main">
   <p:cSld>
     <p:spTree>
